--- a/deliverables/上海AI博物馆_可执行落地方案.pptx
+++ b/deliverables/上海AI博物馆_可执行落地方案.pptx
@@ -3256,7 +3256,7 @@
                 <a:latin typeface="微软雅黑"/>
                 <a:ea typeface="微软雅黑"/>
               </a:rPr>
-              <a:t>上海AI博物馆（全产业链常态化展示与孵化平台）</a:t>
+              <a:t>上海AI博物馆（产业展示与孵化运营平台）</a:t>
             </a:r>
           </a:p>
         </p:txBody>
@@ -3341,7 +3341,7 @@
                 <a:latin typeface="微软雅黑"/>
                 <a:ea typeface="微软雅黑"/>
               </a:rPr>
-              <a:t>对标美国计算机历史博物馆 · WAIC会后365天常态化平台</a:t>
+              <a:t>参与人：陈胜 · 胡继刚 · 陈红苗  |  V1.1 务实修订稿</a:t>
             </a:r>
           </a:p>
         </p:txBody>
@@ -3377,7 +3377,7 @@
                 <a:latin typeface="微软雅黑"/>
                 <a:ea typeface="微软雅黑"/>
               </a:rPr>
-              <a:t>V1.0 讨论稿  |  2026-08-10  |  供场地 / 资方 / 科协路演使用</a:t>
+              <a:t>V1.1 讨论稿  |  2026-08-10  |  供场地 / 资方 / 主管部门路演使用</a:t>
             </a:r>
           </a:p>
         </p:txBody>
@@ -3620,7 +3620,7 @@
                 <a:gridCol w="2857500"/>
                 <a:gridCol w="2857500"/>
               </a:tblGrid>
-              <a:tr h="480060">
+              <a:tr h="548640">
                 <a:tc>
                   <a:txBody>
                     <a:bodyPr/>
@@ -3718,7 +3718,7 @@
                   </a:tcPr>
                 </a:tc>
               </a:tr>
-              <a:tr h="480060">
+              <a:tr h="548640">
                 <a:tc>
                   <a:txBody>
                     <a:bodyPr wrap="square"/>
@@ -3732,7 +3732,7 @@
                           <a:latin typeface="微软雅黑"/>
                           <a:ea typeface="微软雅黑"/>
                         </a:rPr>
-                        <a:t>场地免租/租金补贴</a:t>
+                        <a:t>租金优惠/装修支持</a:t>
                       </a:r>
                     </a:p>
                   </a:txBody>
@@ -3755,7 +3755,7 @@
                           <a:latin typeface="微软雅黑"/>
                           <a:ea typeface="微软雅黑"/>
                         </a:rPr>
-                        <a:t>区属平台、国企闲置物业政策</a:t>
+                        <a:t>区属平台、国企物业政策</a:t>
                       </a:r>
                     </a:p>
                   </a:txBody>
@@ -3778,7 +3778,7 @@
                           <a:latin typeface="微软雅黑"/>
                           <a:ea typeface="微软雅黑"/>
                         </a:rPr>
-                        <a:t>建设期最大头成本</a:t>
+                        <a:t>开办期租金与基础改造</a:t>
                       </a:r>
                     </a:p>
                   </a:txBody>
@@ -3801,7 +3801,7 @@
                           <a:latin typeface="微软雅黑"/>
                           <a:ea typeface="微软雅黑"/>
                         </a:rPr>
-                        <a:t>框架协议优先</a:t>
+                        <a:t>写入租约优先</a:t>
                       </a:r>
                     </a:p>
                   </a:txBody>
@@ -3812,7 +3812,7 @@
                   </a:tcPr>
                 </a:tc>
               </a:tr>
-              <a:tr h="480060">
+              <a:tr h="548640">
                 <a:tc>
                   <a:txBody>
                     <a:bodyPr wrap="square"/>
@@ -3826,7 +3826,7 @@
                           <a:latin typeface="微软雅黑"/>
                           <a:ea typeface="微软雅黑"/>
                         </a:rPr>
-                        <a:t>装修与设备配套</a:t>
+                        <a:t>科普/科协相关经费</a:t>
                       </a:r>
                     </a:p>
                   </a:txBody>
@@ -3849,7 +3849,7 @@
                           <a:latin typeface="微软雅黑"/>
                           <a:ea typeface="微软雅黑"/>
                         </a:rPr>
-                        <a:t>场地方出资约5000万谈判项</a:t>
+                        <a:t>科协及科普专项</a:t>
                       </a:r>
                     </a:p>
                   </a:txBody>
@@ -3872,7 +3872,7 @@
                           <a:latin typeface="微软雅黑"/>
                           <a:ea typeface="微软雅黑"/>
                         </a:rPr>
-                        <a:t>展陈与基建</a:t>
+                        <a:t>科普活动、部分内容制作</a:t>
                       </a:r>
                     </a:p>
                   </a:txBody>
@@ -3895,7 +3895,7 @@
                           <a:latin typeface="微软雅黑"/>
                           <a:ea typeface="微软雅黑"/>
                         </a:rPr>
-                        <a:t>与场地捆绑签约</a:t>
+                        <a:t>年度申报</a:t>
                       </a:r>
                     </a:p>
                   </a:txBody>
@@ -3906,7 +3906,7 @@
                   </a:tcPr>
                 </a:tc>
               </a:tr>
-              <a:tr h="480060">
+              <a:tr h="548640">
                 <a:tc>
                   <a:txBody>
                     <a:bodyPr wrap="square"/>
@@ -3920,7 +3920,7 @@
                           <a:latin typeface="微软雅黑"/>
                           <a:ea typeface="微软雅黑"/>
                         </a:rPr>
-                        <a:t>科普/科协专项</a:t>
+                        <a:t>研学/教育相关支持</a:t>
                       </a:r>
                     </a:p>
                   </a:txBody>
@@ -3943,7 +3943,7 @@
                           <a:latin typeface="微软雅黑"/>
                           <a:ea typeface="微软雅黑"/>
                         </a:rPr>
-                        <a:t>科协系统</a:t>
+                        <a:t>教育与相关主管部门</a:t>
                       </a:r>
                     </a:p>
                   </a:txBody>
@@ -3966,7 +3966,7 @@
                           <a:latin typeface="微软雅黑"/>
                           <a:ea typeface="微软雅黑"/>
                         </a:rPr>
-                        <a:t>展陈内容、科普活动</a:t>
+                        <a:t>课程、师资、接待条件改善</a:t>
                       </a:r>
                     </a:p>
                   </a:txBody>
@@ -3989,7 +3989,7 @@
                           <a:latin typeface="微软雅黑"/>
                           <a:ea typeface="微软雅黑"/>
                         </a:rPr>
-                        <a:t>年度申报</a:t>
+                        <a:t>学期前</a:t>
                       </a:r>
                     </a:p>
                   </a:txBody>
@@ -4000,7 +4000,7 @@
                   </a:tcPr>
                 </a:tc>
               </a:tr>
-              <a:tr h="480060">
+              <a:tr h="548640">
                 <a:tc>
                   <a:txBody>
                     <a:bodyPr wrap="square"/>
@@ -4014,7 +4014,7 @@
                           <a:latin typeface="微软雅黑"/>
                           <a:ea typeface="微软雅黑"/>
                         </a:rPr>
-                        <a:t>研学/教育专项</a:t>
+                        <a:t>科创产业扶持</a:t>
                       </a:r>
                     </a:p>
                   </a:txBody>
@@ -4037,7 +4037,7 @@
                           <a:latin typeface="微软雅黑"/>
                           <a:ea typeface="微软雅黑"/>
                         </a:rPr>
-                        <a:t>教育主管部门</a:t>
+                        <a:t>区科创/经信</a:t>
                       </a:r>
                     </a:p>
                   </a:txBody>
@@ -4060,7 +4060,7 @@
                           <a:latin typeface="微软雅黑"/>
                           <a:ea typeface="微软雅黑"/>
                         </a:rPr>
-                        <a:t>课程、师资、接待设施</a:t>
+                        <a:t>孵化空间、活动、设备（视目录）</a:t>
                       </a:r>
                     </a:p>
                   </a:txBody>
@@ -4083,7 +4083,7 @@
                           <a:latin typeface="微软雅黑"/>
                           <a:ea typeface="微软雅黑"/>
                         </a:rPr>
-                        <a:t>学期前</a:t>
+                        <a:t>批次申报</a:t>
                       </a:r>
                     </a:p>
                   </a:txBody>
@@ -4094,7 +4094,7 @@
                   </a:tcPr>
                 </a:tc>
               </a:tr>
-              <a:tr h="480060">
+              <a:tr h="548640">
                 <a:tc>
                   <a:txBody>
                     <a:bodyPr wrap="square"/>
@@ -4108,7 +4108,7 @@
                           <a:latin typeface="微软雅黑"/>
                           <a:ea typeface="微软雅黑"/>
                         </a:rPr>
-                        <a:t>科创产业扶持</a:t>
+                        <a:t>文旅融合项目</a:t>
                       </a:r>
                     </a:p>
                   </a:txBody>
@@ -4131,7 +4131,7 @@
                           <a:latin typeface="微软雅黑"/>
                           <a:ea typeface="微软雅黑"/>
                         </a:rPr>
-                        <a:t>区科创委/经信</a:t>
+                        <a:t>文旅部门</a:t>
                       </a:r>
                     </a:p>
                   </a:txBody>
@@ -4154,7 +4154,7 @@
                           <a:latin typeface="微软雅黑"/>
                           <a:ea typeface="微软雅黑"/>
                         </a:rPr>
-                        <a:t>孵化空间、算力、活动</a:t>
+                        <a:t>观众服务、品牌活动</a:t>
                       </a:r>
                     </a:p>
                   </a:txBody>
@@ -4177,7 +4177,7 @@
                           <a:latin typeface="微软雅黑"/>
                           <a:ea typeface="微软雅黑"/>
                         </a:rPr>
-                        <a:t>批次申报</a:t>
+                        <a:t>项目制</a:t>
                       </a:r>
                     </a:p>
                   </a:txBody>
@@ -4188,7 +4188,7 @@
                   </a:tcPr>
                 </a:tc>
               </a:tr>
-              <a:tr h="480060">
+              <a:tr h="548640">
                 <a:tc>
                   <a:txBody>
                     <a:bodyPr wrap="square"/>
@@ -4202,7 +4202,7 @@
                           <a:latin typeface="微软雅黑"/>
                           <a:ea typeface="微软雅黑"/>
                         </a:rPr>
-                        <a:t>文旅融合/文创</a:t>
+                        <a:t>产业引导基金</a:t>
                       </a:r>
                     </a:p>
                   </a:txBody>
@@ -4225,7 +4225,7 @@
                           <a:latin typeface="微软雅黑"/>
                           <a:ea typeface="微软雅黑"/>
                         </a:rPr>
-                        <a:t>文旅部门</a:t>
+                        <a:t>区级/央企基金</a:t>
                       </a:r>
                     </a:p>
                   </a:txBody>
@@ -4248,7 +4248,7 @@
                           <a:latin typeface="微软雅黑"/>
                           <a:ea typeface="微软雅黑"/>
                         </a:rPr>
-                        <a:t>观众服务、品牌活动</a:t>
+                        <a:t>符合投向的跟投或主体融资</a:t>
                       </a:r>
                     </a:p>
                   </a:txBody>
@@ -4271,107 +4271,13 @@
                           <a:latin typeface="微软雅黑"/>
                           <a:ea typeface="微软雅黑"/>
                         </a:rPr>
-                        <a:t>项目制</a:t>
+                        <a:t>立项后</a:t>
                       </a:r>
                     </a:p>
                   </a:txBody>
                   <a:tcPr>
                     <a:solidFill>
                       <a:srgbClr val="D7EBE6"/>
-                    </a:solidFill>
-                  </a:tcPr>
-                </a:tc>
-              </a:tr>
-              <a:tr h="480060">
-                <a:tc>
-                  <a:txBody>
-                    <a:bodyPr wrap="square"/>
-                    <a:lstStyle/>
-                    <a:p>
-                      <a:r>
-                        <a:rPr sz="1000" b="0">
-                          <a:solidFill>
-                            <a:srgbClr val="1A2B2E"/>
-                          </a:solidFill>
-                          <a:latin typeface="微软雅黑"/>
-                          <a:ea typeface="微软雅黑"/>
-                        </a:rPr>
-                        <a:t>产业引导基金</a:t>
-                      </a:r>
-                    </a:p>
-                  </a:txBody>
-                  <a:tcPr>
-                    <a:solidFill>
-                      <a:srgbClr val="FFFFFF"/>
-                    </a:solidFill>
-                  </a:tcPr>
-                </a:tc>
-                <a:tc>
-                  <a:txBody>
-                    <a:bodyPr wrap="square"/>
-                    <a:lstStyle/>
-                    <a:p>
-                      <a:r>
-                        <a:rPr sz="1000" b="0">
-                          <a:solidFill>
-                            <a:srgbClr val="1A2B2E"/>
-                          </a:solidFill>
-                          <a:latin typeface="微软雅黑"/>
-                          <a:ea typeface="微软雅黑"/>
-                        </a:rPr>
-                        <a:t>区级基金/央企基金</a:t>
-                      </a:r>
-                    </a:p>
-                  </a:txBody>
-                  <a:tcPr>
-                    <a:solidFill>
-                      <a:srgbClr val="FFFFFF"/>
-                    </a:solidFill>
-                  </a:tcPr>
-                </a:tc>
-                <a:tc>
-                  <a:txBody>
-                    <a:bodyPr wrap="square"/>
-                    <a:lstStyle/>
-                    <a:p>
-                      <a:r>
-                        <a:rPr sz="1000" b="0">
-                          <a:solidFill>
-                            <a:srgbClr val="1A2B2E"/>
-                          </a:solidFill>
-                          <a:latin typeface="微软雅黑"/>
-                          <a:ea typeface="微软雅黑"/>
-                        </a:rPr>
-                        <a:t>入驻项目跟投</a:t>
-                      </a:r>
-                    </a:p>
-                  </a:txBody>
-                  <a:tcPr>
-                    <a:solidFill>
-                      <a:srgbClr val="FFFFFF"/>
-                    </a:solidFill>
-                  </a:tcPr>
-                </a:tc>
-                <a:tc>
-                  <a:txBody>
-                    <a:bodyPr wrap="square"/>
-                    <a:lstStyle/>
-                    <a:p>
-                      <a:r>
-                        <a:rPr sz="1000" b="0">
-                          <a:solidFill>
-                            <a:srgbClr val="1A2B2E"/>
-                          </a:solidFill>
-                          <a:latin typeface="微软雅黑"/>
-                          <a:ea typeface="微软雅黑"/>
-                        </a:rPr>
-                        <a:t>设立后持续</a:t>
-                      </a:r>
-                    </a:p>
-                  </a:txBody>
-                  <a:tcPr>
-                    <a:solidFill>
-                      <a:srgbClr val="FFFFFF"/>
                     </a:solidFill>
                   </a:tcPr>
                 </a:tc>
@@ -4411,7 +4317,7 @@
                 <a:latin typeface="微软雅黑"/>
                 <a:ea typeface="微软雅黑"/>
               </a:rPr>
-              <a:t>执行口诀：先签场地框架（免租+配套资金）→ 同步科协名义 → 再按窗口填报专项；现金资助是加法，场地与设备封闭才是项目能否开工的充要条件。</a:t>
+              <a:t>执行口诀：先谈清租约与装修分摊 → 锁定启动金与主赞助 → 再按窗口申报专项；专项按保守到账比例入预算，未批复前不计入必达资金。</a:t>
             </a:r>
           </a:p>
         </p:txBody>
@@ -4589,7 +4495,7 @@
                 <a:latin typeface="微软雅黑"/>
                 <a:ea typeface="微软雅黑"/>
               </a:rPr>
-              <a:t>6000–10000㎡总盘 · 约2000㎡展陈 · 其余经营反哺</a:t>
+              <a:t>一期可控面积试点 · 租金共担 · 测算后再扩</a:t>
             </a:r>
           </a:p>
         </p:txBody>
@@ -4862,7 +4768,7 @@
                           <a:latin typeface="微软雅黑"/>
                           <a:ea typeface="微软雅黑"/>
                         </a:rPr>
-                        <a:t>约3300㎡（小于理想总量，可作一期）</a:t>
+                        <a:t>约3300㎡，适合作为一期试点</a:t>
                       </a:r>
                     </a:p>
                   </a:txBody>
@@ -4908,7 +4814,7 @@
                           <a:latin typeface="微软雅黑"/>
                           <a:ea typeface="微软雅黑"/>
                         </a:rPr>
-                        <a:t>地段好、研学便利；面积偏紧</a:t>
+                        <a:t>地段好、研学便利；需谈清租期、租金优惠与装修分摊</a:t>
                       </a:r>
                     </a:p>
                   </a:txBody>
@@ -4931,7 +4837,7 @@
                           <a:latin typeface="微软雅黑"/>
                           <a:ea typeface="微软雅黑"/>
                         </a:rPr>
-                        <a:t>正式需求书+免租与5000万条款路演</a:t>
+                        <a:t>投资测算+需求书路演，比选租约条款</a:t>
                       </a:r>
                     </a:p>
                   </a:txBody>
@@ -4956,7 +4862,7 @@
                           <a:latin typeface="微软雅黑"/>
                           <a:ea typeface="微软雅黑"/>
                         </a:rPr>
-                        <a:t>复兴岛场地</a:t>
+                        <a:t>复兴岛相关物业</a:t>
                       </a:r>
                     </a:p>
                   </a:txBody>
@@ -5002,7 +4908,7 @@
                           <a:latin typeface="微软雅黑"/>
                           <a:ea typeface="微软雅黑"/>
                         </a:rPr>
-                        <a:t>具备改造条件；距陆家嘴约25分钟</a:t>
+                        <a:t>具备改造条件；距陆家嘴车程约25分钟</a:t>
                       </a:r>
                     </a:p>
                   </a:txBody>
@@ -5048,7 +4954,7 @@
                           <a:latin typeface="微软雅黑"/>
                           <a:ea typeface="微软雅黑"/>
                         </a:rPr>
-                        <a:t>空间可塑性强；交通相对弱于五角场校区带</a:t>
+                        <a:t>空间可塑性强；通学研学动线弱于五角场校区带</a:t>
                       </a:r>
                     </a:p>
                   </a:txBody>
@@ -5172,7 +5078,7 @@
                           <a:latin typeface="微软雅黑"/>
                           <a:ea typeface="微软雅黑"/>
                         </a:rPr>
-                        <a:t>参考区间（讨论稿）</a:t>
+                        <a:t>参考区间（讨论稿，待测算锁定）</a:t>
                       </a:r>
                     </a:p>
                   </a:txBody>
@@ -5197,7 +5103,7 @@
                           <a:latin typeface="微软雅黑"/>
                           <a:ea typeface="微软雅黑"/>
                         </a:rPr>
-                        <a:t>场地方投入</a:t>
+                        <a:t>物业合作</a:t>
                       </a:r>
                     </a:p>
                   </a:txBody>
@@ -5220,7 +5126,7 @@
                           <a:latin typeface="微软雅黑"/>
                           <a:ea typeface="微软雅黑"/>
                         </a:rPr>
-                        <a:t>免租期折算+装修设备</a:t>
+                        <a:t>租期与租金条件</a:t>
                       </a:r>
                     </a:p>
                   </a:txBody>
@@ -5243,7 +5149,7 @@
                           <a:latin typeface="微软雅黑"/>
                           <a:ea typeface="微软雅黑"/>
                         </a:rPr>
-                        <a:t>免租10–20年 + 约5000万设备装修</a:t>
+                        <a:t>市场租金可谈；争取装修期减免或1–3年阶梯优惠</a:t>
                       </a:r>
                     </a:p>
                   </a:txBody>
@@ -5268,7 +5174,7 @@
                           <a:latin typeface="微软雅黑"/>
                           <a:ea typeface="微软雅黑"/>
                         </a:rPr>
-                        <a:t>展馆面积</a:t>
+                        <a:t>装修与设备</a:t>
                       </a:r>
                     </a:p>
                   </a:txBody>
@@ -5291,7 +5197,7 @@
                           <a:latin typeface="微软雅黑"/>
                           <a:ea typeface="微软雅黑"/>
                         </a:rPr>
-                        <a:t>1–2层展示</a:t>
+                        <a:t>开办资本性支出</a:t>
                       </a:r>
                     </a:p>
                   </a:txBody>
@@ -5314,7 +5220,7 @@
                           <a:latin typeface="微软雅黑"/>
                           <a:ea typeface="微软雅黑"/>
                         </a:rPr>
-                        <a:t>约2000㎡</a:t>
+                        <a:t>按方案级估算后报资方，业主/赞助/自有资金共担</a:t>
                       </a:r>
                     </a:p>
                   </a:txBody>
@@ -5339,7 +5245,7 @@
                           <a:latin typeface="微软雅黑"/>
                           <a:ea typeface="微软雅黑"/>
                         </a:rPr>
-                        <a:t>经营面积</a:t>
+                        <a:t>展示面积（一期）</a:t>
                       </a:r>
                     </a:p>
                   </a:txBody>
@@ -5362,7 +5268,7 @@
                           <a:latin typeface="微软雅黑"/>
                           <a:ea typeface="微软雅黑"/>
                         </a:rPr>
-                        <a:t>孵化办公等</a:t>
+                        <a:t>可运营展示区</a:t>
                       </a:r>
                     </a:p>
                   </a:txBody>
@@ -5385,7 +5291,7 @@
                           <a:latin typeface="微软雅黑"/>
                           <a:ea typeface="微软雅黑"/>
                         </a:rPr>
-                        <a:t>总建约6000–10000㎡中的非展部分</a:t>
+                        <a:t>约1500–3300㎡（创智汇顶楼可作一期）</a:t>
                       </a:r>
                     </a:p>
                   </a:txBody>
@@ -5410,7 +5316,7 @@
                           <a:latin typeface="微软雅黑"/>
                           <a:ea typeface="微软雅黑"/>
                         </a:rPr>
-                        <a:t>对标接待</a:t>
+                        <a:t>配套经营面积</a:t>
                       </a:r>
                     </a:p>
                   </a:txBody>
@@ -5433,7 +5339,7 @@
                           <a:latin typeface="微软雅黑"/>
                           <a:ea typeface="微软雅黑"/>
                         </a:rPr>
-                        <a:t>曹河泾/张江机器人展厅</a:t>
+                        <a:t>可租/可活动面积</a:t>
                       </a:r>
                     </a:p>
                   </a:txBody>
@@ -5456,7 +5362,7 @@
                           <a:latin typeface="微软雅黑"/>
                           <a:ea typeface="微软雅黑"/>
                         </a:rPr>
-                        <a:t>日均上午3场+下午3场研学</a:t>
+                        <a:t>视最终选址物业条件确定</a:t>
                       </a:r>
                     </a:p>
                   </a:txBody>
@@ -5481,7 +5387,7 @@
                           <a:latin typeface="微软雅黑"/>
                           <a:ea typeface="微软雅黑"/>
                         </a:rPr>
-                        <a:t>运营周期</a:t>
+                        <a:t>运营周期假设</a:t>
                       </a:r>
                     </a:p>
                   </a:txBody>
@@ -5504,7 +5410,7 @@
                           <a:latin typeface="微软雅黑"/>
                           <a:ea typeface="微软雅黑"/>
                         </a:rPr>
-                        <a:t>长期价值</a:t>
+                        <a:t>商务计划口径</a:t>
                       </a:r>
                     </a:p>
                   </a:txBody>
@@ -5527,7 +5433,7 @@
                           <a:latin typeface="微软雅黑"/>
                           <a:ea typeface="微软雅黑"/>
                         </a:rPr>
-                        <a:t>至少5–10年</a:t>
+                        <a:t>首期租约建议对标5年左右，含中期评估与续约条款</a:t>
                       </a:r>
                     </a:p>
                   </a:txBody>
@@ -5552,7 +5458,7 @@
                           <a:latin typeface="微软雅黑"/>
                           <a:ea typeface="微软雅黑"/>
                         </a:rPr>
-                        <a:t>项目方建设出资</a:t>
+                        <a:t>项目公司资金</a:t>
                       </a:r>
                     </a:p>
                   </a:txBody>
@@ -5575,7 +5481,7 @@
                           <a:latin typeface="微软雅黑"/>
                           <a:ea typeface="微软雅黑"/>
                         </a:rPr>
-                        <a:t>原则</a:t>
+                        <a:t>开办与运营</a:t>
                       </a:r>
                     </a:p>
                   </a:txBody>
@@ -5598,7 +5504,7 @@
                           <a:latin typeface="微软雅黑"/>
                           <a:ea typeface="微软雅黑"/>
                         </a:rPr>
-                        <a:t>建设期尽量为0；运营公司轻资产</a:t>
+                        <a:t>须单列启动金与12–18个月运营储备，不可假设为零</a:t>
                       </a:r>
                     </a:p>
                   </a:txBody>
@@ -5750,7 +5656,7 @@
                 <a:latin typeface="微软雅黑"/>
                 <a:ea typeface="微软雅黑"/>
               </a:rPr>
-              <a:t>展陈分层与资源地图</a:t>
+              <a:t>内容结构与资源对接</a:t>
             </a:r>
           </a:p>
         </p:txBody>
@@ -5786,7 +5692,7 @@
                 <a:latin typeface="微软雅黑"/>
                 <a:ea typeface="微软雅黑"/>
               </a:rPr>
-              <a:t>美方理论前沿 · 中方产业应用 · 实时更新</a:t>
+              <a:t>可签约、可授权、可更新 —— 不堆概念演示</a:t>
             </a:r>
           </a:p>
         </p:txBody>
@@ -5837,7 +5743,7 @@
         </p:nvGraphicFramePr>
         <p:xfrm>
           <a:off x="365760" y="1280160"/>
-          <a:ext cx="11430000" cy="3200400"/>
+          <a:ext cx="11430000" cy="2926080"/>
         </p:xfrm>
         <a:graphic>
           <a:graphicData uri="http://schemas.openxmlformats.org/drawingml/2006/table">
@@ -5851,7 +5757,7 @@
                 <a:gridCol w="2857500"/>
                 <a:gridCol w="2857500"/>
               </a:tblGrid>
-              <a:tr h="640080">
+              <a:tr h="731520">
                 <a:tc>
                   <a:txBody>
                     <a:bodyPr/>
@@ -5866,7 +5772,7 @@
                           <a:latin typeface="微软雅黑"/>
                           <a:ea typeface="微软雅黑"/>
                         </a:rPr>
-                        <a:t>层级</a:t>
+                        <a:t>板块</a:t>
                       </a:r>
                     </a:p>
                   </a:txBody>
@@ -5914,7 +5820,7 @@
                           <a:latin typeface="微软雅黑"/>
                           <a:ea typeface="微软雅黑"/>
                         </a:rPr>
-                        <a:t>展品来源</a:t>
+                        <a:t>主要来源</a:t>
                       </a:r>
                     </a:p>
                   </a:txBody>
@@ -5938,7 +5844,7 @@
                           <a:latin typeface="微软雅黑"/>
                           <a:ea typeface="微软雅黑"/>
                         </a:rPr>
-                        <a:t>叙事</a:t>
+                        <a:t>说明</a:t>
                       </a:r>
                     </a:p>
                   </a:txBody>
@@ -5949,7 +5855,7 @@
                   </a:tcPr>
                 </a:tc>
               </a:tr>
-              <a:tr h="640080">
+              <a:tr h="731520">
                 <a:tc>
                   <a:txBody>
                     <a:bodyPr wrap="square"/>
@@ -5963,7 +5869,7 @@
                           <a:latin typeface="微软雅黑"/>
                           <a:ea typeface="微软雅黑"/>
                         </a:rPr>
-                        <a:t>芯片/算力/材料层</a:t>
+                        <a:t>基础设施</a:t>
                       </a:r>
                     </a:p>
                   </a:txBody>
@@ -5986,7 +5892,7 @@
                           <a:latin typeface="微软雅黑"/>
                           <a:ea typeface="微软雅黑"/>
                         </a:rPr>
-                        <a:t>芯片、服务器、算力基础设施（含低成本小型AI服务器趋势）</a:t>
+                        <a:t>算力、芯片与基础系统演进（可展实物/图示）</a:t>
                       </a:r>
                     </a:p>
                   </a:txBody>
@@ -6009,7 +5915,7 @@
                           <a:latin typeface="微软雅黑"/>
                           <a:ea typeface="微软雅黑"/>
                         </a:rPr>
-                        <a:t>国内外硬件与云厂商</a:t>
+                        <a:t>硬件与云相关企业</a:t>
                       </a:r>
                     </a:p>
                   </a:txBody>
@@ -6032,7 +5938,7 @@
                           <a:latin typeface="微软雅黑"/>
                           <a:ea typeface="微软雅黑"/>
                         </a:rPr>
-                        <a:t>AI基础设施史</a:t>
+                        <a:t>强调可说明、可授权</a:t>
                       </a:r>
                     </a:p>
                   </a:txBody>
@@ -6043,7 +5949,7 @@
                   </a:tcPr>
                 </a:tc>
               </a:tr>
-              <a:tr h="640080">
+              <a:tr h="731520">
                 <a:tc>
                   <a:txBody>
                     <a:bodyPr wrap="square"/>
@@ -6057,7 +5963,7 @@
                           <a:latin typeface="微软雅黑"/>
                           <a:ea typeface="微软雅黑"/>
                         </a:rPr>
-                        <a:t>技术应用层</a:t>
+                        <a:t>模型与工具</a:t>
                       </a:r>
                     </a:p>
                   </a:txBody>
@@ -6080,7 +5986,7 @@
                           <a:latin typeface="微软雅黑"/>
                           <a:ea typeface="微软雅黑"/>
                         </a:rPr>
-                        <a:t>大模型、代码辅助、企业应用</a:t>
+                        <a:t>通用模型与开发工具的产业应用</a:t>
                       </a:r>
                     </a:p>
                   </a:txBody>
@@ -6103,7 +6009,7 @@
                           <a:latin typeface="微软雅黑"/>
                           <a:ea typeface="微软雅黑"/>
                         </a:rPr>
-                        <a:t>国内头部大模型企业为主</a:t>
+                        <a:t>在沪科技企业为主</a:t>
                       </a:r>
                     </a:p>
                   </a:txBody>
@@ -6126,7 +6032,7 @@
                           <a:latin typeface="微软雅黑"/>
                           <a:ea typeface="微软雅黑"/>
                         </a:rPr>
-                        <a:t>中国应用优势</a:t>
+                        <a:t>以签约展位落地</a:t>
                       </a:r>
                     </a:p>
                   </a:txBody>
@@ -6137,7 +6043,7 @@
                   </a:tcPr>
                 </a:tc>
               </a:tr>
-              <a:tr h="640080">
+              <a:tr h="731520">
                 <a:tc>
                   <a:txBody>
                     <a:bodyPr wrap="square"/>
@@ -6151,7 +6057,7 @@
                           <a:latin typeface="微软雅黑"/>
                           <a:ea typeface="微软雅黑"/>
                         </a:rPr>
-                        <a:t>具身/移动/行业层</a:t>
+                        <a:t>行业应用</a:t>
                       </a:r>
                     </a:p>
                   </a:txBody>
@@ -6174,7 +6080,7 @@
                           <a:latin typeface="微软雅黑"/>
                           <a:ea typeface="微软雅黑"/>
                         </a:rPr>
-                        <a:t>机器人、无人机、教育、航海、行业场景</a:t>
+                        <a:t>教育、制造、交通等已落地案例</a:t>
                       </a:r>
                     </a:p>
                   </a:txBody>
@@ -6197,7 +6103,7 @@
                           <a:latin typeface="微软雅黑"/>
                           <a:ea typeface="微软雅黑"/>
                         </a:rPr>
-                        <a:t>具身智能与行业解决方案商</a:t>
+                        <a:t>行业解决方案商</a:t>
                       </a:r>
                     </a:p>
                   </a:txBody>
@@ -6220,107 +6126,13 @@
                           <a:latin typeface="微软雅黑"/>
                           <a:ea typeface="微软雅黑"/>
                         </a:rPr>
-                        <a:t>产业落地</a:t>
+                        <a:t>避免概念演示充数</a:t>
                       </a:r>
                     </a:p>
                   </a:txBody>
                   <a:tcPr>
                     <a:solidFill>
                       <a:srgbClr val="FFFFFF"/>
-                    </a:solidFill>
-                  </a:tcPr>
-                </a:tc>
-              </a:tr>
-              <a:tr h="640080">
-                <a:tc>
-                  <a:txBody>
-                    <a:bodyPr wrap="square"/>
-                    <a:lstStyle/>
-                    <a:p>
-                      <a:r>
-                        <a:rPr sz="1000" b="0">
-                          <a:solidFill>
-                            <a:srgbClr val="1A2B2E"/>
-                          </a:solidFill>
-                          <a:latin typeface="微软雅黑"/>
-                          <a:ea typeface="微软雅黑"/>
-                        </a:rPr>
-                        <a:t>中美对照叙事</a:t>
-                      </a:r>
-                    </a:p>
-                  </a:txBody>
-                  <a:tcPr>
-                    <a:solidFill>
-                      <a:srgbClr val="D7EBE6"/>
-                    </a:solidFill>
-                  </a:tcPr>
-                </a:tc>
-                <a:tc>
-                  <a:txBody>
-                    <a:bodyPr wrap="square"/>
-                    <a:lstStyle/>
-                    <a:p>
-                      <a:r>
-                        <a:rPr sz="1000" b="0">
-                          <a:solidFill>
-                            <a:srgbClr val="1A2B2E"/>
-                          </a:solidFill>
-                          <a:latin typeface="微软雅黑"/>
-                          <a:ea typeface="微软雅黑"/>
-                        </a:rPr>
-                        <a:t>美方理论前沿 vs 中方产业应用</a:t>
-                      </a:r>
-                    </a:p>
-                  </a:txBody>
-                  <a:tcPr>
-                    <a:solidFill>
-                      <a:srgbClr val="D7EBE6"/>
-                    </a:solidFill>
-                  </a:tcPr>
-                </a:tc>
-                <a:tc>
-                  <a:txBody>
-                    <a:bodyPr wrap="square"/>
-                    <a:lstStyle/>
-                    <a:p>
-                      <a:r>
-                        <a:rPr sz="1000" b="0">
-                          <a:solidFill>
-                            <a:srgbClr val="1A2B2E"/>
-                          </a:solidFill>
-                          <a:latin typeface="微软雅黑"/>
-                          <a:ea typeface="微软雅黑"/>
-                        </a:rPr>
-                        <a:t>硅谷企业/高校 + 国内头部</a:t>
-                      </a:r>
-                    </a:p>
-                  </a:txBody>
-                  <a:tcPr>
-                    <a:solidFill>
-                      <a:srgbClr val="D7EBE6"/>
-                    </a:solidFill>
-                  </a:tcPr>
-                </a:tc>
-                <a:tc>
-                  <a:txBody>
-                    <a:bodyPr wrap="square"/>
-                    <a:lstStyle/>
-                    <a:p>
-                      <a:r>
-                        <a:rPr sz="1000" b="0">
-                          <a:solidFill>
-                            <a:srgbClr val="1A2B2E"/>
-                          </a:solidFill>
-                          <a:latin typeface="微软雅黑"/>
-                          <a:ea typeface="微软雅黑"/>
-                        </a:rPr>
-                        <a:t>实时连线与内容更新</a:t>
-                      </a:r>
-                    </a:p>
-                  </a:txBody>
-                  <a:tcPr>
-                    <a:solidFill>
-                      <a:srgbClr val="D7EBE6"/>
                     </a:solidFill>
                   </a:tcPr>
                 </a:tc>
@@ -6337,8 +6149,8 @@
         </p:nvSpPr>
         <p:spPr>
           <a:xfrm>
-            <a:off x="457200" y="4754880"/>
-            <a:ext cx="10972800" cy="1463040"/>
+            <a:off x="457200" y="4480560"/>
+            <a:ext cx="10972800" cy="1645920"/>
           </a:xfrm>
           <a:prstGeom prst="rect">
             <a:avLst/>
@@ -6364,7 +6176,7 @@
                 <a:latin typeface="微软雅黑"/>
                 <a:ea typeface="微软雅黑"/>
               </a:rPr>
-              <a:t>•  已筛美国核心展品约前20项；国内优先头部有收入企业</a:t>
+              <a:t>•  展品与案例以合同/授权为前提，未签约不写入开业必保清单</a:t>
             </a:r>
           </a:p>
           <a:p>
@@ -6381,7 +6193,7 @@
                 <a:latin typeface="微软雅黑"/>
                 <a:ea typeface="微软雅黑"/>
               </a:rPr>
-              <a:t>•  陈院长可对接谷歌等资源；可联动李飞飞等海外人物直播</a:t>
+              <a:t>•  陈胜补充海外授权线索；国内头部企业集中在沪，适合批量谈展位</a:t>
             </a:r>
           </a:p>
           <a:p>
@@ -6398,7 +6210,7 @@
                 <a:latin typeface="微软雅黑"/>
                 <a:ea typeface="微软雅黑"/>
               </a:rPr>
-              <a:t>•  国内头部大模型企业多数注册在上海，集中拜访效率高</a:t>
+              <a:t>•  涉外内容先做法务预审，不预设名人直播等不可控事项</a:t>
             </a:r>
           </a:p>
         </p:txBody>
@@ -6640,7 +6452,7 @@
                 <a:gridCol w="1889760"/>
                 <a:gridCol w="1889760"/>
               </a:tblGrid>
-              <a:tr h="400050">
+              <a:tr h="457200">
                 <a:tc>
                   <a:txBody>
                     <a:bodyPr/>
@@ -6714,7 +6526,7 @@
                   </a:tcPr>
                 </a:tc>
               </a:tr>
-              <a:tr h="400050">
+              <a:tr h="457200">
                 <a:tc>
                   <a:txBody>
                     <a:bodyPr wrap="square"/>
@@ -6728,7 +6540,7 @@
                           <a:latin typeface="微软雅黑"/>
                           <a:ea typeface="微软雅黑"/>
                         </a:rPr>
-                        <a:t>顶层主管</a:t>
+                        <a:t>方案发起/海外线索</a:t>
                       </a:r>
                     </a:p>
                   </a:txBody>
@@ -6751,7 +6563,7 @@
                           <a:latin typeface="微软雅黑"/>
                           <a:ea typeface="微软雅黑"/>
                         </a:rPr>
-                        <a:t>中国科协（目标）</a:t>
+                        <a:t>陈胜</a:t>
                       </a:r>
                     </a:p>
                   </a:txBody>
@@ -6774,7 +6586,7 @@
                           <a:latin typeface="微软雅黑"/>
                           <a:ea typeface="微软雅黑"/>
                         </a:rPr>
-                        <a:t>名称IP、行业合法性、专项与全国复制</a:t>
+                        <a:t>海外授权线索、方案补充、博物馆运营经验访谈</a:t>
                       </a:r>
                     </a:p>
                   </a:txBody>
@@ -6785,7 +6597,7 @@
                   </a:tcPr>
                 </a:tc>
               </a:tr>
-              <a:tr h="400050">
+              <a:tr h="457200">
                 <a:tc>
                   <a:txBody>
                     <a:bodyPr wrap="square"/>
@@ -6799,7 +6611,7 @@
                           <a:latin typeface="微软雅黑"/>
                           <a:ea typeface="微软雅黑"/>
                         </a:rPr>
-                        <a:t>发起/海外资源</a:t>
+                        <a:t>国内统筹</a:t>
                       </a:r>
                     </a:p>
                   </a:txBody>
@@ -6822,7 +6634,7 @@
                           <a:latin typeface="微软雅黑"/>
                           <a:ea typeface="微软雅黑"/>
                         </a:rPr>
-                        <a:t>陈院长及美西团队</a:t>
+                        <a:t>胡继刚</a:t>
                       </a:r>
                     </a:p>
                   </a:txBody>
@@ -6845,7 +6657,7 @@
                           <a:latin typeface="微软雅黑"/>
                           <a:ea typeface="微软雅黑"/>
                         </a:rPr>
-                        <a:t>硅谷对接、海外展陈与内容、补充方案</a:t>
+                        <a:t>方案文本、政府与场地资方路演材料、整体日程</a:t>
                       </a:r>
                     </a:p>
                   </a:txBody>
@@ -6856,7 +6668,7 @@
                   </a:tcPr>
                 </a:tc>
               </a:tr>
-              <a:tr h="400050">
+              <a:tr h="457200">
                 <a:tc>
                   <a:txBody>
                     <a:bodyPr wrap="square"/>
@@ -6870,7 +6682,7 @@
                           <a:latin typeface="微软雅黑"/>
                           <a:ea typeface="微软雅黑"/>
                         </a:rPr>
-                        <a:t>国内统筹</a:t>
+                        <a:t>场地与资方对接</a:t>
                       </a:r>
                     </a:p>
                   </a:txBody>
@@ -6893,7 +6705,7 @@
                           <a:latin typeface="微软雅黑"/>
                           <a:ea typeface="微软雅黑"/>
                         </a:rPr>
-                        <a:t>胡老师+国内团队</a:t>
+                        <a:t>陈红苗</a:t>
                       </a:r>
                     </a:p>
                   </a:txBody>
@@ -6916,7 +6728,7 @@
                           <a:latin typeface="微软雅黑"/>
                           <a:ea typeface="微软雅黑"/>
                         </a:rPr>
-                        <a:t>方案文本、政府与场地资方路演、日程</a:t>
+                        <a:t>场地谈判配合、资方沟通、教育与渠道对接</a:t>
                       </a:r>
                     </a:p>
                   </a:txBody>
@@ -6927,7 +6739,7 @@
                   </a:tcPr>
                 </a:tc>
               </a:tr>
-              <a:tr h="400050">
+              <a:tr h="457200">
                 <a:tc>
                   <a:txBody>
                     <a:bodyPr wrap="square"/>
@@ -6941,7 +6753,7 @@
                           <a:latin typeface="微软雅黑"/>
                           <a:ea typeface="微软雅黑"/>
                         </a:rPr>
-                        <a:t>场地与建设</a:t>
+                        <a:t>物业与工程</a:t>
                       </a:r>
                     </a:p>
                   </a:txBody>
@@ -6987,7 +6799,7 @@
                           <a:latin typeface="微软雅黑"/>
                           <a:ea typeface="微软雅黑"/>
                         </a:rPr>
-                        <a:t>免租物业、装修设备出资、工程</a:t>
+                        <a:t>租约、改造工程、交付标准</a:t>
                       </a:r>
                     </a:p>
                   </a:txBody>
@@ -6998,7 +6810,7 @@
                   </a:tcPr>
                 </a:tc>
               </a:tr>
-              <a:tr h="400050">
+              <a:tr h="457200">
                 <a:tc>
                   <a:txBody>
                     <a:bodyPr wrap="square"/>
@@ -7012,7 +6824,7 @@
                           <a:latin typeface="微软雅黑"/>
                           <a:ea typeface="微软雅黑"/>
                         </a:rPr>
-                        <a:t>主赞助/资本</a:t>
+                        <a:t>主赞助/战略资本</a:t>
                       </a:r>
                     </a:p>
                   </a:txBody>
@@ -7035,7 +6847,7 @@
                           <a:latin typeface="微软雅黑"/>
                           <a:ea typeface="微软雅黑"/>
                         </a:rPr>
-                        <a:t>华润等意向央国企</a:t>
+                        <a:t>意向央国企等</a:t>
                       </a:r>
                     </a:p>
                   </a:txBody>
@@ -7058,7 +6870,7 @@
                           <a:latin typeface="微软雅黑"/>
                           <a:ea typeface="微软雅黑"/>
                         </a:rPr>
-                        <a:t>核心费用或场地、科创叙事</a:t>
+                        <a:t>赞助或战略合作出资</a:t>
                       </a:r>
                     </a:p>
                   </a:txBody>
@@ -7069,7 +6881,7 @@
                   </a:tcPr>
                 </a:tc>
               </a:tr>
-              <a:tr h="400050">
+              <a:tr h="457200">
                 <a:tc>
                   <a:txBody>
                     <a:bodyPr wrap="square"/>
@@ -7083,7 +6895,7 @@
                           <a:latin typeface="微软雅黑"/>
                           <a:ea typeface="微软雅黑"/>
                         </a:rPr>
-                        <a:t>生态合作</a:t>
+                        <a:t>运营公司</a:t>
                       </a:r>
                     </a:p>
                   </a:txBody>
@@ -7106,7 +6918,7 @@
                           <a:latin typeface="微软雅黑"/>
                           <a:ea typeface="微软雅黑"/>
                         </a:rPr>
-                        <a:t>曾达等AI布局方、头部企业</a:t>
+                        <a:t>待设运营主体</a:t>
                       </a:r>
                     </a:p>
                   </a:txBody>
@@ -7129,84 +6941,13 @@
                           <a:latin typeface="微软雅黑"/>
                           <a:ea typeface="微软雅黑"/>
                         </a:rPr>
-                        <a:t>展陈、流量、产业协同</a:t>
+                        <a:t>日常运营、招商、研学、财务管理</a:t>
                       </a:r>
                     </a:p>
                   </a:txBody>
                   <a:tcPr>
                     <a:solidFill>
                       <a:srgbClr val="D7EBE6"/>
-                    </a:solidFill>
-                  </a:tcPr>
-                </a:tc>
-              </a:tr>
-              <a:tr h="400050">
-                <a:tc>
-                  <a:txBody>
-                    <a:bodyPr wrap="square"/>
-                    <a:lstStyle/>
-                    <a:p>
-                      <a:r>
-                        <a:rPr sz="800" b="0">
-                          <a:solidFill>
-                            <a:srgbClr val="1A2B2E"/>
-                          </a:solidFill>
-                          <a:latin typeface="微软雅黑"/>
-                          <a:ea typeface="微软雅黑"/>
-                        </a:rPr>
-                        <a:t>运营公司</a:t>
-                      </a:r>
-                    </a:p>
-                  </a:txBody>
-                  <a:tcPr>
-                    <a:solidFill>
-                      <a:srgbClr val="FFFFFF"/>
-                    </a:solidFill>
-                  </a:tcPr>
-                </a:tc>
-                <a:tc>
-                  <a:txBody>
-                    <a:bodyPr wrap="square"/>
-                    <a:lstStyle/>
-                    <a:p>
-                      <a:r>
-                        <a:rPr sz="800" b="0">
-                          <a:solidFill>
-                            <a:srgbClr val="1A2B2E"/>
-                          </a:solidFill>
-                          <a:latin typeface="微软雅黑"/>
-                          <a:ea typeface="微软雅黑"/>
-                        </a:rPr>
-                        <a:t>待设轻资产主体</a:t>
-                      </a:r>
-                    </a:p>
-                  </a:txBody>
-                  <a:tcPr>
-                    <a:solidFill>
-                      <a:srgbClr val="FFFFFF"/>
-                    </a:solidFill>
-                  </a:tcPr>
-                </a:tc>
-                <a:tc>
-                  <a:txBody>
-                    <a:bodyPr wrap="square"/>
-                    <a:lstStyle/>
-                    <a:p>
-                      <a:r>
-                        <a:rPr sz="800" b="0">
-                          <a:solidFill>
-                            <a:srgbClr val="1A2B2E"/>
-                          </a:solidFill>
-                          <a:latin typeface="微软雅黑"/>
-                          <a:ea typeface="微软雅黑"/>
-                        </a:rPr>
-                        <a:t>日常运营、招商、研学、孵化投资执行</a:t>
-                      </a:r>
-                    </a:p>
-                  </a:txBody>
-                  <a:tcPr>
-                    <a:solidFill>
-                      <a:srgbClr val="FFFFFF"/>
                     </a:solidFill>
                   </a:tcPr>
                 </a:tc>
@@ -7351,7 +7092,7 @@
                           <a:latin typeface="微软雅黑"/>
                           <a:ea typeface="微软雅黑"/>
                         </a:rPr>
-                        <a:t>0. 材料与共识</a:t>
+                        <a:t>0. 材料与测算</a:t>
                       </a:r>
                     </a:p>
                   </a:txBody>
@@ -7397,7 +7138,7 @@
                           <a:latin typeface="微软雅黑"/>
                           <a:ea typeface="微软雅黑"/>
                         </a:rPr>
-                        <a:t>极简BP、投资/盈利/政策一页纸、预算框架</a:t>
+                        <a:t>极简BP、投资/盈利/政策一页纸、一期预算框架</a:t>
                       </a:r>
                     </a:p>
                   </a:txBody>
@@ -7420,7 +7161,7 @@
                           <a:latin typeface="微软雅黑"/>
                           <a:ea typeface="微软雅黑"/>
                         </a:rPr>
-                        <a:t>群内定稿可外发</a:t>
+                        <a:t>可外发且数字自洽</a:t>
                       </a:r>
                     </a:p>
                   </a:txBody>
@@ -7491,7 +7232,7 @@
                           <a:latin typeface="微软雅黑"/>
                           <a:ea typeface="微软雅黑"/>
                         </a:rPr>
-                        <a:t>两处场地+华润/区政府/科协路演纪要</a:t>
+                        <a:t>两处场地+潜在赞助/区平台路演纪要</a:t>
                       </a:r>
                     </a:p>
                   </a:txBody>
@@ -7514,7 +7255,7 @@
                           <a:latin typeface="微软雅黑"/>
                           <a:ea typeface="微软雅黑"/>
                         </a:rPr>
-                        <a:t>至少1个场地框架意向</a:t>
+                        <a:t>至少1份可谈判租约/合作要点</a:t>
                       </a:r>
                     </a:p>
                   </a:txBody>
@@ -7539,7 +7280,7 @@
                           <a:latin typeface="微软雅黑"/>
                           <a:ea typeface="微软雅黑"/>
                         </a:rPr>
-                        <a:t>2. 签约绑定</a:t>
+                        <a:t>2. 条款绑定</a:t>
                       </a:r>
                     </a:p>
                   </a:txBody>
@@ -7585,7 +7326,7 @@
                           <a:latin typeface="微软雅黑"/>
                           <a:ea typeface="微软雅黑"/>
                         </a:rPr>
-                        <a:t>场地免租+出资协议、科协合作文件、主赞助意向</a:t>
+                        <a:t>租约与装修分摊、主赞助意向、关键专项申报启动</a:t>
                       </a:r>
                     </a:p>
                   </a:txBody>
@@ -7608,7 +7349,7 @@
                           <a:latin typeface="微软雅黑"/>
                           <a:ea typeface="微软雅黑"/>
                         </a:rPr>
-                        <a:t>建设资金与场地封闭</a:t>
+                        <a:t>开办资金来源可覆盖预算</a:t>
                       </a:r>
                     </a:p>
                   </a:txBody>
@@ -7633,7 +7374,7 @@
                           <a:latin typeface="微软雅黑"/>
                           <a:ea typeface="微软雅黑"/>
                         </a:rPr>
-                        <a:t>3. 展陈与装修</a:t>
+                        <a:t>3. 设计与装修</a:t>
                       </a:r>
                     </a:p>
                   </a:txBody>
@@ -7656,7 +7397,7 @@
                           <a:latin typeface="微软雅黑"/>
                           <a:ea typeface="微软雅黑"/>
                         </a:rPr>
-                        <a:t>3–9月</a:t>
+                        <a:t>租约后3–9月</a:t>
                       </a:r>
                     </a:p>
                   </a:txBody>
@@ -7679,7 +7420,7 @@
                           <a:latin typeface="微软雅黑"/>
                           <a:ea typeface="微软雅黑"/>
                         </a:rPr>
-                        <a:t>动线施工图、展品清单签约、开馆内容包</a:t>
+                        <a:t>施工图、展位清单签约、开业内容包</a:t>
                       </a:r>
                     </a:p>
                   </a:txBody>
@@ -7702,7 +7443,7 @@
                           <a:latin typeface="微软雅黑"/>
                           <a:ea typeface="微软雅黑"/>
                         </a:rPr>
-                        <a:t>试运行接待</a:t>
+                        <a:t>通过试运行接待</a:t>
                       </a:r>
                     </a:p>
                   </a:txBody>
@@ -7727,7 +7468,7 @@
                           <a:latin typeface="微软雅黑"/>
                           <a:ea typeface="微软雅黑"/>
                         </a:rPr>
-                        <a:t>4. 开馆运营</a:t>
+                        <a:t>4. 开业运营</a:t>
                       </a:r>
                     </a:p>
                   </a:txBody>
@@ -7750,7 +7491,7 @@
                           <a:latin typeface="微软雅黑"/>
                           <a:ea typeface="微软雅黑"/>
                         </a:rPr>
-                        <a:t>开馆后0–12月</a:t>
+                        <a:t>开业后0–12月</a:t>
                       </a:r>
                     </a:p>
                   </a:txBody>
@@ -7773,7 +7514,7 @@
                           <a:latin typeface="微软雅黑"/>
                           <a:ea typeface="微软雅黑"/>
                         </a:rPr>
-                        <a:t>研学排期、招商出租率、内容周更</a:t>
+                        <a:t>研学排期、可租面积去化、赞助履约</a:t>
                       </a:r>
                     </a:p>
                   </a:txBody>
@@ -7796,7 +7537,7 @@
                           <a:latin typeface="微软雅黑"/>
                           <a:ea typeface="微软雅黑"/>
                         </a:rPr>
-                        <a:t>达对标接待与出租率</a:t>
+                        <a:t>达到预算约定的经营指标</a:t>
                       </a:r>
                     </a:p>
                   </a:txBody>
@@ -7821,7 +7562,7 @@
                           <a:latin typeface="微软雅黑"/>
                           <a:ea typeface="微软雅黑"/>
                         </a:rPr>
-                        <a:t>5. 复制准备</a:t>
+                        <a:t>5. 优化扩展</a:t>
                       </a:r>
                     </a:p>
                   </a:txBody>
@@ -7844,7 +7585,7 @@
                           <a:latin typeface="微软雅黑"/>
                           <a:ea typeface="微软雅黑"/>
                         </a:rPr>
-                        <a:t>开馆后12月+</a:t>
+                        <a:t>开业后12月+</a:t>
                       </a:r>
                     </a:p>
                   </a:txBody>
@@ -7867,7 +7608,7 @@
                           <a:latin typeface="微软雅黑"/>
                           <a:ea typeface="微软雅黑"/>
                         </a:rPr>
-                        <a:t>SOP与模板包、外埠意向</a:t>
+                        <a:t>SOP沉淀；评估是否外拓咨询</a:t>
                       </a:r>
                     </a:p>
                   </a:txBody>
@@ -7890,7 +7631,7 @@
                           <a:latin typeface="微软雅黑"/>
                           <a:ea typeface="微软雅黑"/>
                         </a:rPr>
-                        <a:t>首个输出合同</a:t>
+                        <a:t>数据驱动决策</a:t>
                       </a:r>
                     </a:p>
                   </a:txBody>
@@ -8255,7 +7996,7 @@
                           <a:latin typeface="微软雅黑"/>
                           <a:ea typeface="微软雅黑"/>
                         </a:rPr>
-                        <a:t>场地免租+出资谈判失败</a:t>
+                        <a:t>租金与装修谈判达不成</a:t>
                       </a:r>
                     </a:p>
                   </a:txBody>
@@ -8301,7 +8042,7 @@
                           <a:latin typeface="微软雅黑"/>
                           <a:ea typeface="微软雅黑"/>
                         </a:rPr>
-                        <a:t>核心难点在谈判</a:t>
+                        <a:t>优惠幅度不足则开办成本过高</a:t>
                       </a:r>
                     </a:p>
                   </a:txBody>
@@ -8324,7 +8065,7 @@
                           <a:latin typeface="微软雅黑"/>
                           <a:ea typeface="微软雅黑"/>
                         </a:rPr>
-                        <a:t>多场地并行；权益包量化政绩与租金分成</a:t>
+                        <a:t>双场地并行；准备保底租金方案与缩期一期</a:t>
                       </a:r>
                     </a:p>
                   </a:txBody>
@@ -8349,7 +8090,7 @@
                           <a:latin typeface="微软雅黑"/>
                           <a:ea typeface="微软雅黑"/>
                         </a:rPr>
-                        <a:t>单一政府/企业无法独扛</a:t>
+                        <a:t>开办资金闭环失败</a:t>
                       </a:r>
                     </a:p>
                   </a:txBody>
@@ -8372,7 +8113,7 @@
                           <a:latin typeface="微软雅黑"/>
                           <a:ea typeface="微软雅黑"/>
                         </a:rPr>
-                        <a:t>中</a:t>
+                        <a:t>高</a:t>
                       </a:r>
                     </a:p>
                   </a:txBody>
@@ -8395,7 +8136,7 @@
                           <a:latin typeface="微软雅黑"/>
                           <a:ea typeface="微软雅黑"/>
                         </a:rPr>
-                        <a:t>体制局限或号召力不足</a:t>
+                        <a:t>赞助与专项不及预期</a:t>
                       </a:r>
                     </a:p>
                   </a:txBody>
@@ -8418,7 +8159,7 @@
                           <a:latin typeface="微软雅黑"/>
                           <a:ea typeface="微软雅黑"/>
                         </a:rPr>
-                        <a:t>第三方整合+科协背书+分层赞助</a:t>
+                        <a:t>启动金底线+分期开业；砍非必要展陈</a:t>
                       </a:r>
                     </a:p>
                   </a:txBody>
@@ -8443,7 +8184,7 @@
                           <a:latin typeface="微软雅黑"/>
                           <a:ea typeface="微软雅黑"/>
                         </a:rPr>
-                        <a:t>中美内容双向同步受限</a:t>
+                        <a:t>把政策当成已兑现收入</a:t>
                       </a:r>
                     </a:p>
                   </a:txBody>
@@ -8466,7 +8207,7 @@
                           <a:latin typeface="微软雅黑"/>
                           <a:ea typeface="微软雅黑"/>
                         </a:rPr>
-                        <a:t>高</a:t>
+                        <a:t>中</a:t>
                       </a:r>
                     </a:p>
                   </a:txBody>
@@ -8489,7 +8230,7 @@
                           <a:latin typeface="微软雅黑"/>
                           <a:ea typeface="微软雅黑"/>
                         </a:rPr>
-                        <a:t>需确认美方接受度</a:t>
+                        <a:t>申报有窗口与不确定性</a:t>
                       </a:r>
                     </a:p>
                   </a:txBody>
@@ -8512,7 +8253,7 @@
                           <a:latin typeface="微软雅黑"/>
                           <a:ea typeface="微软雅黑"/>
                         </a:rPr>
-                        <a:t>授权分级；理论/应用分展区；合规审查</a:t>
+                        <a:t>预算中专项只计保守到账比例</a:t>
                       </a:r>
                     </a:p>
                   </a:txBody>
@@ -8537,7 +8278,7 @@
                           <a:latin typeface="微软雅黑"/>
                           <a:ea typeface="微软雅黑"/>
                         </a:rPr>
-                        <a:t>预算不清导致推进空转</a:t>
+                        <a:t>与现有科技展厅同质化</a:t>
                       </a:r>
                     </a:p>
                   </a:txBody>
@@ -8560,7 +8301,7 @@
                           <a:latin typeface="微软雅黑"/>
                           <a:ea typeface="微软雅黑"/>
                         </a:rPr>
-                        <a:t>高</a:t>
+                        <a:t>中</a:t>
                       </a:r>
                     </a:p>
                   </a:txBody>
@@ -8583,7 +8324,7 @@
                           <a:latin typeface="微软雅黑"/>
                           <a:ea typeface="微软雅黑"/>
                         </a:rPr>
-                        <a:t>无清晰预算难闭环资方</a:t>
+                        <a:t>曹河泾/张江等已有展陈</a:t>
                       </a:r>
                     </a:p>
                   </a:txBody>
@@ -8606,7 +8347,7 @@
                           <a:latin typeface="微软雅黑"/>
                           <a:ea typeface="微软雅黑"/>
                         </a:rPr>
-                        <a:t>先出大框架预算再施工图</a:t>
+                        <a:t>强化研学服务与企业展位运营，而非概念堆砌</a:t>
                       </a:r>
                     </a:p>
                   </a:txBody>
@@ -8631,7 +8372,7 @@
                           <a:latin typeface="微软雅黑"/>
                           <a:ea typeface="微软雅黑"/>
                         </a:rPr>
-                        <a:t>与现有机器人展厅同质化</a:t>
+                        <a:t>内容授权与合规</a:t>
                       </a:r>
                     </a:p>
                   </a:txBody>
@@ -8677,7 +8418,7 @@
                           <a:latin typeface="微软雅黑"/>
                           <a:ea typeface="微软雅黑"/>
                         </a:rPr>
-                        <a:t>曹河泾/张江已有展厅</a:t>
+                        <a:t>涉外与企业品牌使用限制</a:t>
                       </a:r>
                     </a:p>
                   </a:txBody>
@@ -8700,7 +8441,7 @@
                           <a:latin typeface="微软雅黑"/>
                           <a:ea typeface="微软雅黑"/>
                         </a:rPr>
-                        <a:t>强调全产业链+历史叙事+中美实时+孵化</a:t>
+                        <a:t>先签授权再制作；法务预审</a:t>
                       </a:r>
                     </a:p>
                   </a:txBody>
@@ -8725,7 +8466,7 @@
                           <a:latin typeface="微软雅黑"/>
                           <a:ea typeface="微软雅黑"/>
                         </a:rPr>
-                        <a:t>研学政策执行不及预期</a:t>
+                        <a:t>研学招生不及预期</a:t>
                       </a:r>
                     </a:p>
                   </a:txBody>
@@ -8771,7 +8512,7 @@
                           <a:latin typeface="微软雅黑"/>
                           <a:ea typeface="微软雅黑"/>
                         </a:rPr>
-                        <a:t>地方落地节奏不一</a:t>
+                        <a:t>学期节奏与采购周期</a:t>
                       </a:r>
                     </a:p>
                   </a:txBody>
@@ -8794,7 +8535,7 @@
                           <a:latin typeface="微软雅黑"/>
                           <a:ea typeface="微软雅黑"/>
                         </a:rPr>
-                        <a:t>多区试点；B端机构双轮</a:t>
+                        <a:t>机构渠道双轮；淡季靠企业活动补</a:t>
                       </a:r>
                     </a:p>
                   </a:txBody>
@@ -8880,7 +8621,7 @@
                 <a:latin typeface="微软雅黑"/>
                 <a:ea typeface="微软雅黑"/>
               </a:rPr>
-              <a:t>•  陈院长：向项目群发送AI博物馆极简文字材料（高 / 返美前）</a:t>
+              <a:t>•  陈胜：向项目群发送项目极简文字材料（高 / 近期）</a:t>
             </a:r>
           </a:p>
           <a:p>
@@ -8897,7 +8638,7 @@
                 <a:latin typeface="微软雅黑"/>
                 <a:ea typeface="微软雅黑"/>
               </a:rPr>
-              <a:t>•  陈院长：返美后整合硅谷资源，对接海外展陈与内容（高 / 持续）</a:t>
+              <a:t>•  陈胜：补充海外侧可对接资源清单（授权可行性优先）（高 / 持续）</a:t>
             </a:r>
           </a:p>
           <a:p>
@@ -8914,7 +8655,7 @@
                 <a:latin typeface="微软雅黑"/>
                 <a:ea typeface="微软雅黑"/>
               </a:rPr>
-              <a:t>•  陈院长：会见航海博物馆馆长，咨询建馆运营经验（中 / 近期）</a:t>
+              <a:t>•  陈胜：会见航海博物馆相关负责人，咨询建馆运营经验（中 / 近期）</a:t>
             </a:r>
           </a:p>
           <a:p>
@@ -8931,7 +8672,7 @@
                 <a:latin typeface="微软雅黑"/>
                 <a:ea typeface="微软雅黑"/>
               </a:rPr>
-              <a:t>•  胡老师：整理双场讨论，形成可展示项目版本（高 / 本周）</a:t>
+              <a:t>•  胡继刚：整理双场讨论，形成可对外项目版本（本套材料）（高 / 本周）</a:t>
             </a:r>
           </a:p>
           <a:p>
@@ -8948,7 +8689,7 @@
                 <a:latin typeface="微软雅黑"/>
                 <a:ea typeface="微软雅黑"/>
               </a:rPr>
-              <a:t>•  说话人1/配合方：配合梳理思路，分别对接场地与资方（高 / 本周启动）</a:t>
+              <a:t>•  陈红苗：配合梳理思路，分别对接场地与资方（高 / 本周启动）</a:t>
             </a:r>
           </a:p>
           <a:p>
@@ -8965,7 +8706,7 @@
                 <a:latin typeface="微软雅黑"/>
                 <a:ea typeface="微软雅黑"/>
               </a:rPr>
-              <a:t>•  参会团队：邀请曾达共同推进（中 / 近期）</a:t>
+              <a:t>•  胡继刚/陈红苗：与区平台、科协等沟通合作路径与申报窗口（高 / 两周内）</a:t>
             </a:r>
           </a:p>
           <a:p>
@@ -8982,7 +8723,7 @@
                 <a:latin typeface="微软雅黑"/>
                 <a:ea typeface="微软雅黑"/>
               </a:rPr>
-              <a:t>•  国内团队：与科协/地方政府确认牵头与名称IP路径（高 / 两周内）</a:t>
+              <a:t>•  参会团队：视进展邀请产业侧合作方共同推进（中 / 按需）</a:t>
             </a:r>
           </a:p>
         </p:txBody>
@@ -9355,7 +9096,7 @@
                 <a:latin typeface="微软雅黑"/>
                 <a:ea typeface="微软雅黑"/>
               </a:rPr>
-              <a:t>▸  08  展陈分层与资源地图</a:t>
+              <a:t>▸  08  内容结构与资源对接</a:t>
             </a:r>
           </a:p>
           <a:p>
@@ -9639,7 +9380,7 @@
                 <a:latin typeface="微软雅黑"/>
                 <a:ea typeface="微软雅黑"/>
               </a:rPr>
-              <a:t>两场沟通围绕「在上海筹建AI博物馆」展开：场次一明确全产业链展陈、教育部认证与研学切入、华润等赞助商与海外变现思路；场次二由陈院长提出完整方案，就项目定位、场地、资金、盈利、科协牵头与分工达成共识，约定会后整理可展示方案并分别对接场地与资方。</a:t>
+              <a:t>两场沟通围绕「在上海筹建AI相关产业展馆」展开：场次一讨论教育研学切入、赞助合作与内容运营方向；场次二由陈胜提出整体框架，与胡继刚、陈红苗就项目定位、场地、资金、盈利与分工交换意见，约定会后整理可对外材料，并分头对接场地与资方。</a:t>
             </a:r>
           </a:p>
         </p:txBody>
@@ -9803,7 +9544,7 @@
                 <a:latin typeface="微软雅黑"/>
                 <a:ea typeface="微软雅黑"/>
               </a:rPr>
-              <a:t>•  教育部认证 + 研学切入</a:t>
+              <a:t>•  教育研学切入</a:t>
             </a:r>
           </a:p>
           <a:p>
@@ -9820,7 +9561,7 @@
                 <a:latin typeface="微软雅黑"/>
                 <a:ea typeface="微软雅黑"/>
               </a:rPr>
-              <a:t>•  一二层信息化展馆</a:t>
+              <a:t>•  一期可控面积试点</a:t>
             </a:r>
           </a:p>
           <a:p>
@@ -9837,7 +9578,7 @@
                 <a:latin typeface="微软雅黑"/>
                 <a:ea typeface="微软雅黑"/>
               </a:rPr>
-              <a:t>•  三层结构：算力/应用/移动AI</a:t>
+              <a:t>•  算力 / 模型 / 行业应用</a:t>
             </a:r>
           </a:p>
           <a:p>
@@ -9854,7 +9595,7 @@
                 <a:latin typeface="微软雅黑"/>
                 <a:ea typeface="微软雅黑"/>
               </a:rPr>
-              <a:t>•  华润等赞助商思路</a:t>
+              <a:t>•  赞助与战略合作思路</a:t>
             </a:r>
           </a:p>
           <a:p>
@@ -9871,7 +9612,7 @@
                 <a:latin typeface="微软雅黑"/>
                 <a:ea typeface="微软雅黑"/>
               </a:rPr>
-              <a:t>•  海外账号反向变现</a:t>
+              <a:t>•  内容运营需合规授权</a:t>
             </a:r>
           </a:p>
           <a:p>
@@ -9888,7 +9629,7 @@
                 <a:latin typeface="微软雅黑"/>
                 <a:ea typeface="微软雅黑"/>
               </a:rPr>
-              <a:t>•  运营周期 5–10 年</a:t>
+              <a:t>•  参与：陈胜等</a:t>
             </a:r>
           </a:p>
         </p:txBody>
@@ -10052,7 +9793,7 @@
                 <a:latin typeface="微软雅黑"/>
                 <a:ea typeface="微软雅黑"/>
               </a:rPr>
-              <a:t>•  陈院长提出完整方案</a:t>
+              <a:t>•  陈胜提出整体框架</a:t>
             </a:r>
           </a:p>
           <a:p>
@@ -10069,7 +9810,7 @@
                 <a:latin typeface="微软雅黑"/>
                 <a:ea typeface="微软雅黑"/>
               </a:rPr>
-              <a:t>•  免租10–20年+约5000万设备</a:t>
+              <a:t>•  租金优惠+装修共担（可谈）</a:t>
             </a:r>
           </a:p>
           <a:p>
@@ -10103,7 +9844,7 @@
                 <a:latin typeface="微软雅黑"/>
                 <a:ea typeface="微软雅黑"/>
               </a:rPr>
-              <a:t>•  科协牵头抢IP</a:t>
+              <a:t>•  科协等社团合作路径</a:t>
             </a:r>
           </a:p>
           <a:p>
@@ -10120,7 +9861,7 @@
                 <a:latin typeface="微软雅黑"/>
                 <a:ea typeface="微软雅黑"/>
               </a:rPr>
-              <a:t>•  租金+孵化+模板输出</a:t>
+              <a:t>•  租金+研学+展位赞助</a:t>
             </a:r>
           </a:p>
           <a:p>
@@ -10137,7 +9878,7 @@
                 <a:latin typeface="微软雅黑"/>
                 <a:ea typeface="微软雅黑"/>
               </a:rPr>
-              <a:t>•  胡老师整理可展示版本</a:t>
+              <a:t>•  胡继刚整理、陈红苗对接</a:t>
             </a:r>
           </a:p>
         </p:txBody>
@@ -10301,7 +10042,7 @@
                 <a:latin typeface="微软雅黑"/>
                 <a:ea typeface="微软雅黑"/>
               </a:rPr>
-              <a:t>•  投资方如何出资／入场（场地免费期、设备装修金、赞助层级、股权孵化）</a:t>
+              <a:t>•  投资方如何出资／入场（租金与装修共担、赞助层级、引导基金与跟投）</a:t>
             </a:r>
           </a:p>
           <a:p>
@@ -10318,7 +10059,7 @@
                 <a:latin typeface="微软雅黑"/>
                 <a:ea typeface="微软雅黑"/>
               </a:rPr>
-              <a:t>•  项目如何持续盈利（租金运营、孵化投资、模板输出、研学、海外内容变现）</a:t>
+              <a:t>•  项目如何持续盈利（空间经营、研学服务、孵化收益、可复制运营输出）</a:t>
             </a:r>
           </a:p>
           <a:p>
@@ -10335,7 +10076,7 @@
                 <a:latin typeface="微软雅黑"/>
                 <a:ea typeface="微软雅黑"/>
               </a:rPr>
-              <a:t>•  政策性支持如何落地（教育部研学强制要求、科协牵头、政府场地与扶持基金）</a:t>
+              <a:t>•  政策性支持如何落地（教育研学、科普专项、科创扶持、闲置物业盘活）</a:t>
             </a:r>
           </a:p>
         </p:txBody>
@@ -10513,7 +10254,7 @@
                 <a:latin typeface="微软雅黑"/>
                 <a:ea typeface="微软雅黑"/>
               </a:rPr>
-              <a:t>名称IP × 全产业链 × 会后365天</a:t>
+              <a:t>常设展陈 × 研学服务 × 空间经营</a:t>
             </a:r>
           </a:p>
         </p:txBody>
@@ -10713,7 +10454,7 @@
                 <a:latin typeface="微软雅黑"/>
                 <a:ea typeface="微软雅黑"/>
               </a:rPr>
-              <a:t>•  世界人工智能大会闭幕后的常态化AI展示与孵化平台</a:t>
+              <a:t>•  人工智能产业相关的常设展示与配套服务空间</a:t>
             </a:r>
           </a:p>
           <a:p>
@@ -10730,7 +10471,7 @@
                 <a:latin typeface="微软雅黑"/>
                 <a:ea typeface="微软雅黑"/>
               </a:rPr>
-              <a:t>•  覆盖芯片—应用—具身全链，串联历史与最新成果</a:t>
+              <a:t>•  内容以可签约展位与可核验应用案例为主</a:t>
             </a:r>
           </a:p>
           <a:p>
@@ -10747,7 +10488,7 @@
                 <a:latin typeface="微软雅黑"/>
                 <a:ea typeface="微软雅黑"/>
               </a:rPr>
-              <a:t>•  做成可向其他城市复制的标准模板</a:t>
+              <a:t>•  一期小步验证，再谈扩展与对外输出</a:t>
             </a:r>
           </a:p>
         </p:txBody>
@@ -10911,7 +10652,7 @@
                 <a:latin typeface="微软雅黑"/>
                 <a:ea typeface="微软雅黑"/>
               </a:rPr>
-              <a:t>•  现有展厅多聚焦机器人交易展示；本项目做AI全产业链博物馆+历史溯源。</a:t>
+              <a:t>•  相对单一品类展厅，本项目强调可签约企业展位 + 研学服务 + 配套空间经营。</a:t>
             </a:r>
           </a:p>
           <a:p>
@@ -10928,7 +10669,7 @@
                 <a:latin typeface="微软雅黑"/>
                 <a:ea typeface="微软雅黑"/>
               </a:rPr>
-              <a:t>•  政府或单一互联网公司难以独力整合全链资源；第三方+科协可居中调度。</a:t>
+              <a:t>•  相对临展，本项目按常设场馆做租约、团队与内容更新机制。</a:t>
             </a:r>
           </a:p>
           <a:p>
@@ -10945,24 +10686,7 @@
                 <a:latin typeface="微软雅黑"/>
                 <a:ea typeface="微软雅黑"/>
               </a:rPr>
-              <a:t>•  绑定WAIC会后365天场景，形成城市级常设IP而非一过性展览。</a:t>
-            </a:r>
-          </a:p>
-          <a:p>
-            <a:pPr>
-              <a:lnSpc>
-                <a:spcPct val="120000"/>
-              </a:lnSpc>
-            </a:pPr>
-            <a:r>
-              <a:rPr sz="1100" b="0">
-                <a:solidFill>
-                  <a:srgbClr val="1A2B2E"/>
-                </a:solidFill>
-                <a:latin typeface="微软雅黑"/>
-                <a:ea typeface="微软雅黑"/>
-              </a:rPr>
-              <a:t>•  中美对照与硅谷实时连线，构成内容壁垒。</a:t>
+              <a:t>•  相对纯物业招商，本项目用展陈与活动能力提升可租面积溢价与周转。</a:t>
             </a:r>
           </a:p>
         </p:txBody>
@@ -11029,7 +10753,7 @@
                           <a:latin typeface="微软雅黑"/>
                           <a:ea typeface="微软雅黑"/>
                         </a:rPr>
-                        <a:t>现有机器人展厅</a:t>
+                        <a:t>现有科技/机器人展厅</a:t>
                       </a:r>
                     </a:p>
                   </a:txBody>
@@ -11053,7 +10777,7 @@
                           <a:latin typeface="微软雅黑"/>
                           <a:ea typeface="微软雅黑"/>
                         </a:rPr>
-                        <a:t>本项目AI博物馆</a:t>
+                        <a:t>本项目（目标）</a:t>
                       </a:r>
                     </a:p>
                   </a:txBody>
@@ -11101,7 +10825,7 @@
                           <a:latin typeface="微软雅黑"/>
                           <a:ea typeface="微软雅黑"/>
                         </a:rPr>
-                        <a:t>机器人为主</a:t>
+                        <a:t>单一品类展示居多</a:t>
                       </a:r>
                     </a:p>
                   </a:txBody>
@@ -11124,7 +10848,7 @@
                           <a:latin typeface="微软雅黑"/>
                           <a:ea typeface="微软雅黑"/>
                         </a:rPr>
-                        <a:t>AI全产业链+历史溯源</a:t>
+                        <a:t>基础设施+模型工具+行业应用</a:t>
                       </a:r>
                     </a:p>
                   </a:txBody>
@@ -11172,7 +10896,7 @@
                           <a:latin typeface="微软雅黑"/>
                           <a:ea typeface="微软雅黑"/>
                         </a:rPr>
-                        <a:t>交易与展示</a:t>
+                        <a:t>展示/交易为主</a:t>
                       </a:r>
                     </a:p>
                   </a:txBody>
@@ -11195,7 +10919,7 @@
                           <a:latin typeface="微软雅黑"/>
                           <a:ea typeface="微软雅黑"/>
                         </a:rPr>
-                        <a:t>展示+研学认证+孵化投资+模板输出</a:t>
+                        <a:t>展示+研学服务+配套空间经营</a:t>
                       </a:r>
                     </a:p>
                   </a:txBody>
@@ -11243,7 +10967,7 @@
                           <a:latin typeface="微软雅黑"/>
                           <a:ea typeface="微软雅黑"/>
                         </a:rPr>
-                        <a:t>国内产业为主</a:t>
+                        <a:t>临展或固定陈列</a:t>
                       </a:r>
                     </a:p>
                   </a:txBody>
@@ -11266,7 +10990,7 @@
                           <a:latin typeface="微软雅黑"/>
                           <a:ea typeface="微软雅黑"/>
                         </a:rPr>
-                        <a:t>中美对照 + 硅谷实时连线</a:t>
+                        <a:t>企业展位合同+定期更新机制</a:t>
                       </a:r>
                     </a:p>
                   </a:txBody>
@@ -11314,7 +11038,7 @@
                           <a:latin typeface="微软雅黑"/>
                           <a:ea typeface="微软雅黑"/>
                         </a:rPr>
-                        <a:t>企业/园区主导</a:t>
+                        <a:t>企业或园区单方主导</a:t>
                       </a:r>
                     </a:p>
                   </a:txBody>
@@ -11337,7 +11061,7 @@
                           <a:latin typeface="微软雅黑"/>
                           <a:ea typeface="微软雅黑"/>
                         </a:rPr>
-                        <a:t>科协牵头 + 多主体共建</a:t>
+                        <a:t>运营公司+赞助+物业多方共建</a:t>
                       </a:r>
                     </a:p>
                   </a:txBody>
@@ -11489,7 +11213,7 @@
                 <a:latin typeface="微软雅黑"/>
                 <a:ea typeface="微软雅黑"/>
               </a:rPr>
-              <a:t>投资总原则：不自有资金站上制高点</a:t>
+              <a:t>投资总原则：可组合、可核算、可退出</a:t>
             </a:r>
           </a:p>
         </p:txBody>
@@ -11525,7 +11249,7 @@
                 <a:latin typeface="微软雅黑"/>
                 <a:ea typeface="微软雅黑"/>
               </a:rPr>
-              <a:t>多主体分担 · 分层组合 · 用IP换长期权益</a:t>
+              <a:t>租金共担 · 赞助分层 · 专项与启动金闭环</a:t>
             </a:r>
           </a:p>
         </p:txBody>
@@ -11597,7 +11321,7 @@
                 <a:latin typeface="微软雅黑"/>
                 <a:ea typeface="微软雅黑"/>
               </a:rPr>
-              <a:t>核心策略：「不自有资金站上制高点」——建设与装修改造由合作方承担，项目方以IP运营、资源整合与孵化投资能力换取长期权益；投资结构分层、可组合，避免单一资方绑架。</a:t>
+              <a:t>核心策略：建设与运营资金「可组合、可核算、可退出」——以租金优惠/装修共担、赞助与展位、专项补贴和自有启动金构成一期资金盘，避免把超长期零租金或场地方大额无偿出资写成既定条件；项目公司保留运营与品牌权益，投资结构分层，防止单一资方绑架。</a:t>
             </a:r>
           </a:p>
         </p:txBody>
@@ -11713,7 +11437,7 @@
                           <a:latin typeface="微软雅黑"/>
                           <a:ea typeface="微软雅黑"/>
                         </a:rPr>
-                        <a:t>A. 场地方「地+钱」合作</a:t>
+                        <a:t>A. 场地方租金与装修共担</a:t>
                       </a:r>
                     </a:p>
                   </a:txBody>
@@ -11736,7 +11460,7 @@
                           <a:latin typeface="微软雅黑"/>
                           <a:ea typeface="微软雅黑"/>
                         </a:rPr>
-                        <a:t>10–20年免费场地使用权 + 约5000万装修/设备采购资金</a:t>
+                        <a:t>市场化租金为基础；争取装修期减免或开业后1–3年租金阶梯优惠；装修/基础机电可由业主部分投入，运营方或赞助方补齐，按合同回收或分成</a:t>
                       </a:r>
                     </a:p>
                   </a:txBody>
@@ -11784,7 +11508,7 @@
                           <a:latin typeface="微软雅黑"/>
                           <a:ea typeface="微软雅黑"/>
                         </a:rPr>
-                        <a:t>B. 主赞助商（场地或核心费用）</a:t>
+                        <a:t>B. 主赞助 / 战略合作出资</a:t>
                       </a:r>
                     </a:p>
                   </a:txBody>
@@ -11807,7 +11531,7 @@
                           <a:latin typeface="微软雅黑"/>
                           <a:ea typeface="微软雅黑"/>
                         </a:rPr>
-                        <a:t>承担场地租金折算、展陈主投或运营启动金；可现金+实物（展品/算力）</a:t>
+                        <a:t>现金赞助、展陈主投或运营启动金；可搭配实物（展品、设备）按评估入账</a:t>
                       </a:r>
                     </a:p>
                   </a:txBody>
@@ -11855,7 +11579,7 @@
                           <a:latin typeface="微软雅黑"/>
                           <a:ea typeface="微软雅黑"/>
                         </a:rPr>
-                        <a:t>C. 金牌/展席赞助（头部AI企业捐赠）</a:t>
+                        <a:t>C. 企业展位与内容合作</a:t>
                       </a:r>
                     </a:p>
                   </a:txBody>
@@ -11878,7 +11602,7 @@
                           <a:latin typeface="微软雅黑"/>
                           <a:ea typeface="微软雅黑"/>
                         </a:rPr>
-                        <a:t>展品捐赠+展位建设费+年度内容更新费；可选现金捐赠换历史席位</a:t>
+                        <a:t>展位建设费+年度内容更新费；或展品借用/捐赠+基础布展成本分摊</a:t>
                       </a:r>
                     </a:p>
                   </a:txBody>
@@ -11949,7 +11673,7 @@
                           <a:latin typeface="微软雅黑"/>
                           <a:ea typeface="微软雅黑"/>
                         </a:rPr>
-                        <a:t>场地租金补贴、文旅/科普/科创专项、产业引导基金配套、装修补助</a:t>
+                        <a:t>租金/装修补助、科普与科创专项、文旅融合项目资助、引导基金配套（若符合）</a:t>
                       </a:r>
                     </a:p>
                   </a:txBody>
@@ -11997,7 +11721,7 @@
                           <a:latin typeface="微软雅黑"/>
                           <a:ea typeface="微软雅黑"/>
                         </a:rPr>
-                        <a:t>E. 科协牵头专项</a:t>
+                        <a:t>E. 科协等社团合作</a:t>
                       </a:r>
                     </a:p>
                   </a:txBody>
@@ -12020,7 +11744,7 @@
                           <a:latin typeface="微软雅黑"/>
                           <a:ea typeface="微软雅黑"/>
                         </a:rPr>
-                        <a:t>名义主管+专项经费/科普经费；协助抢占「AI博物馆」名称与资质</a:t>
+                        <a:t>合作挂牌、科普活动联合、可申报的科普/学术活动经费（以实际批复为准）</a:t>
                       </a:r>
                     </a:p>
                   </a:txBody>
@@ -12043,7 +11767,7 @@
                           <a:latin typeface="微软雅黑"/>
                           <a:ea typeface="微软雅黑"/>
                         </a:rPr>
-                        <a:t>P0</a:t>
+                        <a:t>P1</a:t>
                       </a:r>
                     </a:p>
                   </a:txBody>
@@ -12068,7 +11792,7 @@
                           <a:latin typeface="微软雅黑"/>
                           <a:ea typeface="微软雅黑"/>
                         </a:rPr>
-                        <a:t>F. 孵化跟投（轻资本）</a:t>
+                        <a:t>F. 运营方启动资金与跟投</a:t>
                       </a:r>
                     </a:p>
                   </a:txBody>
@@ -12091,7 +11815,7 @@
                           <a:latin typeface="微软雅黑"/>
                           <a:ea typeface="微软雅黑"/>
                         </a:rPr>
-                        <a:t>对入驻优质AI项目小额股权跟投/收益权；可用运营方管理公司主体承接</a:t>
+                        <a:t>运营公司自有/股东启动金覆盖设计、团队与开业前费用；对入驻优质项目小额跟投另设池</a:t>
                       </a:r>
                     </a:p>
                   </a:txBody>
@@ -12114,7 +11838,7 @@
                           <a:latin typeface="微软雅黑"/>
                           <a:ea typeface="微软雅黑"/>
                         </a:rPr>
-                        <a:t>P2</a:t>
+                        <a:t>P0</a:t>
                       </a:r>
                     </a:p>
                   </a:txBody>
@@ -12139,7 +11863,7 @@
                           <a:latin typeface="微软雅黑"/>
                           <a:ea typeface="微软雅黑"/>
                         </a:rPr>
-                        <a:t>G. 海外内容与品牌合作</a:t>
+                        <a:t>G. 授权类内容合作</a:t>
                       </a:r>
                     </a:p>
                   </a:txBody>
@@ -12162,7 +11886,7 @@
                           <a:latin typeface="微软雅黑"/>
                           <a:ea typeface="微软雅黑"/>
                         </a:rPr>
-                        <a:t>展品授权/内容共建（非现金为主）；联合直播与活动赞助</a:t>
+                        <a:t>展品/影像授权费或互换资源；活动联合赞助（一事一议）</a:t>
                       </a:r>
                     </a:p>
                   </a:txBody>
@@ -12185,7 +11909,7 @@
                           <a:latin typeface="微软雅黑"/>
                           <a:ea typeface="微软雅黑"/>
                         </a:rPr>
-                        <a:t>P1</a:t>
+                        <a:t>P2</a:t>
                       </a:r>
                     </a:p>
                   </a:txBody>
@@ -12373,7 +12097,7 @@
                 <a:latin typeface="微软雅黑"/>
                 <a:ea typeface="微软雅黑"/>
               </a:rPr>
-              <a:t>场地钱、主赞助、政府基金、科协专项先闭环</a:t>
+              <a:t>物业共担、主赞助、政府专项、启动资金先闭环</a:t>
             </a:r>
           </a:p>
         </p:txBody>
@@ -12533,7 +12257,7 @@
                 <a:latin typeface="微软雅黑"/>
                 <a:ea typeface="微软雅黑"/>
               </a:rPr>
-              <a:t>A. 场地方「地+钱」合作</a:t>
+              <a:t>A. 场地方租金与装修共担</a:t>
             </a:r>
           </a:p>
         </p:txBody>
@@ -12573,7 +12297,7 @@
                 <a:latin typeface="微软雅黑"/>
                 <a:ea typeface="微软雅黑"/>
               </a:rPr>
-              <a:t>•  怎么出：10–20年免费场地使用权 + 约5000万装修/设备采购资金</a:t>
+              <a:t>•  怎么出：市场化租金为基础；争取装修期减免或开业后1–3年租金阶梯优惠；装修/基础机电可由…</a:t>
             </a:r>
           </a:p>
           <a:p>
@@ -12590,7 +12314,7 @@
                 <a:latin typeface="微软雅黑"/>
                 <a:ea typeface="微软雅黑"/>
               </a:rPr>
-              <a:t>•  谁来出：拥有闲置物业的央国企/区属平台（如科创集团、华润系物业）</a:t>
+              <a:t>•  谁来出：拥有可改造物业的区属平台、央国企物业（如科创集团、华润系物业等）</a:t>
             </a:r>
           </a:p>
           <a:p>
@@ -12607,7 +12331,7 @@
                 <a:latin typeface="微软雅黑"/>
                 <a:ea typeface="微软雅黑"/>
               </a:rPr>
-              <a:t>•  回报：政绩亮点（高层考察）、物业盘活、剩余楼层租金分成或优先招商权、品牌冠名可选</a:t>
+              <a:t>•  回报：稳定租金与物业增值、剩余可租面积招商分成、品牌联合与政务参观场景</a:t>
             </a:r>
           </a:p>
           <a:p>
@@ -12624,7 +12348,7 @@
                 <a:latin typeface="微软雅黑"/>
                 <a:ea typeface="微软雅黑"/>
               </a:rPr>
-              <a:t>•  动作：出具需求书→双候选场地路演→签约框架（免租期+出资额+分成公式）</a:t>
+              <a:t>•  动作：需求书+投资测算→双场地比选路演→框架协议（租期、优惠条件、装修分摊、退出）</a:t>
             </a:r>
           </a:p>
         </p:txBody>
@@ -12748,7 +12472,7 @@
                 <a:latin typeface="微软雅黑"/>
                 <a:ea typeface="微软雅黑"/>
               </a:rPr>
-              <a:t>B. 主赞助商（场地或核心费用）</a:t>
+              <a:t>B. 主赞助 / 战略合作出资</a:t>
             </a:r>
           </a:p>
         </p:txBody>
@@ -12788,7 +12512,7 @@
                 <a:latin typeface="微软雅黑"/>
                 <a:ea typeface="微软雅黑"/>
               </a:rPr>
-              <a:t>•  怎么出：承担场地租金折算、展陈主投或运营启动金；可现金+实物（展品/算力）</a:t>
+              <a:t>•  怎么出：现金赞助、展陈主投或运营启动金；可搭配实物（展品、设备）按评估入账</a:t>
             </a:r>
           </a:p>
           <a:p>
@@ -12805,7 +12529,7 @@
                 <a:latin typeface="微软雅黑"/>
                 <a:ea typeface="微软雅黑"/>
               </a:rPr>
-              <a:t>•  谁来出：华润等有科创投入考核的央国企；有向上汇报「AI故事」需求的产业集团</a:t>
+              <a:t>•  谁来出：有科创合作与品牌曝光需求的央国企、产业集团</a:t>
             </a:r>
           </a:p>
           <a:p>
@@ -12822,7 +12546,7 @@
                 <a:latin typeface="微软雅黑"/>
                 <a:ea typeface="微软雅黑"/>
               </a:rPr>
-              <a:t>•  回报：主赞助商权益、AI行业历史展席位、联合发布与WAIC联动曝光</a:t>
+              <a:t>•  回报：主赞助权益、联合活动、指定展区露出、年度报告与参访安排</a:t>
             </a:r>
           </a:p>
           <a:p>
@@ -12839,7 +12563,7 @@
                 <a:latin typeface="微软雅黑"/>
                 <a:ea typeface="微软雅黑"/>
               </a:rPr>
-              <a:t>•  动作：一页纸权益包→同学/董事会通道引荐→立项材料对齐其科创KPI</a:t>
+              <a:t>•  动作：一页纸权益包→对接人对齐对方立项KPI→赞助/合作协议</a:t>
             </a:r>
           </a:p>
         </p:txBody>
@@ -13003,7 +12727,7 @@
                 <a:latin typeface="微软雅黑"/>
                 <a:ea typeface="微软雅黑"/>
               </a:rPr>
-              <a:t>•  怎么出：场地租金补贴、文旅/科普/科创专项、产业引导基金配套、装修补助</a:t>
+              <a:t>•  怎么出：租金/装修补助、科普与科创专项、文旅融合项目资助、引导基金配套（若符合）</a:t>
             </a:r>
           </a:p>
           <a:p>
@@ -13020,7 +12744,7 @@
                 <a:latin typeface="微软雅黑"/>
                 <a:ea typeface="微软雅黑"/>
               </a:rPr>
-              <a:t>•  谁来出：区政府、科创委、文旅局、教育局（研学）、科协系统专项</a:t>
+              <a:t>•  谁来出：区政府相关部门、科创/经信、文旅、教育、科协系统</a:t>
             </a:r>
           </a:p>
           <a:p>
@@ -13037,7 +12761,7 @@
                 <a:latin typeface="微软雅黑"/>
                 <a:ea typeface="微软雅黑"/>
               </a:rPr>
-              <a:t>•  回报：公共服务供给、研学指标完成、科创政绩与WAIC延伸场景</a:t>
+              <a:t>•  回报：公共服务与科普供给、研学与科创场景、重点项目库政绩</a:t>
             </a:r>
           </a:p>
           <a:p>
@@ -13054,7 +12778,7 @@
                 <a:latin typeface="微软雅黑"/>
                 <a:ea typeface="微软雅黑"/>
               </a:rPr>
-              <a:t>•  动作：政策清单匹配→申报材料包→纳入区重点项目库</a:t>
+              <a:t>•  动作：政策匹配表→材料包→申报与验收台账</a:t>
             </a:r>
           </a:p>
         </p:txBody>
@@ -13178,7 +12902,7 @@
                 <a:latin typeface="微软雅黑"/>
                 <a:ea typeface="微软雅黑"/>
               </a:rPr>
-              <a:t>E. 科协牵头专项</a:t>
+              <a:t>F. 运营方启动资金与跟投</a:t>
             </a:r>
           </a:p>
         </p:txBody>
@@ -13218,7 +12942,7 @@
                 <a:latin typeface="微软雅黑"/>
                 <a:ea typeface="微软雅黑"/>
               </a:rPr>
-              <a:t>•  怎么出：名义主管+专项经费/科普经费；协助抢占「AI博物馆」名称与资质</a:t>
+              <a:t>•  怎么出：运营公司自有/股东启动金覆盖设计、团队与开业前费用；对入驻优质项目小额跟投另设池</a:t>
             </a:r>
           </a:p>
           <a:p>
@@ -13235,7 +12959,7 @@
                 <a:latin typeface="微软雅黑"/>
                 <a:ea typeface="微软雅黑"/>
               </a:rPr>
-              <a:t>•  谁来出：中国科协及地方科协（发起人已与科协主席初步沟通）</a:t>
+              <a:t>•  谁来出：项目运营主体股东；可联合区引导基金子基金</a:t>
             </a:r>
           </a:p>
           <a:p>
@@ -13252,7 +12976,7 @@
                 <a:latin typeface="微软雅黑"/>
                 <a:ea typeface="微软雅黑"/>
               </a:rPr>
-              <a:t>•  回报：行业制高点、科普职能落地、全国复制时的系统内通道</a:t>
+              <a:t>•  回报：运营利润分配；跟投项目长期资本回报（不计入开业必达）</a:t>
             </a:r>
           </a:p>
           <a:p>
@@ -13269,7 +12993,7 @@
                 <a:latin typeface="微软雅黑"/>
                 <a:ea typeface="微软雅黑"/>
               </a:rPr>
-              <a:t>•  动作：正式汇报材料→名称与主管单位确认→专项申报</a:t>
+              <a:t>•  动作：明确一期启动金预算→公司主体与治理→跟投SOP（后期）</a:t>
             </a:r>
           </a:p>
         </p:txBody>
@@ -13447,7 +13171,7 @@
                 <a:latin typeface="微软雅黑"/>
                 <a:ea typeface="微软雅黑"/>
               </a:rPr>
-              <a:t>把「历史席位」产品化，方便企业立项</a:t>
+              <a:t>权益可报价、可立项、可验收</a:t>
             </a:r>
           </a:p>
         </p:txBody>
@@ -13551,7 +13275,7 @@
                           <a:latin typeface="微软雅黑"/>
                           <a:ea typeface="微软雅黑"/>
                         </a:rPr>
-                        <a:t>出资门槛（建议）</a:t>
+                        <a:t>出资门槛（建议，可议）</a:t>
                       </a:r>
                     </a:p>
                   </a:txBody>
@@ -13647,7 +13371,7 @@
                           <a:latin typeface="微软雅黑"/>
                           <a:ea typeface="微软雅黑"/>
                         </a:rPr>
-                        <a:t>场地或≥3000万级核心费用/等值</a:t>
+                        <a:t>按一期预算单列，建议不低于核心开办费用的显著比例</a:t>
                       </a:r>
                     </a:p>
                   </a:txBody>
@@ -13670,7 +13394,7 @@
                           <a:latin typeface="微软雅黑"/>
                           <a:ea typeface="微软雅黑"/>
                         </a:rPr>
-                        <a:t>冠名协商权、主视觉露出、开幕式主位、年度联名活动</a:t>
+                        <a:t>冠名协商、主视觉、开幕主位、年度联名活动</a:t>
                       </a:r>
                     </a:p>
                   </a:txBody>
@@ -13741,7 +13465,7 @@
                           <a:latin typeface="微软雅黑"/>
                           <a:ea typeface="微软雅黑"/>
                         </a:rPr>
-                        <a:t>500–1500万现金/展陈建设+年度更新</a:t>
+                        <a:t>展区建设+年度更新，或等额现金赞助</a:t>
                       </a:r>
                     </a:p>
                   </a:txBody>
@@ -13764,7 +13488,7 @@
                           <a:latin typeface="微软雅黑"/>
                           <a:ea typeface="微软雅黑"/>
                         </a:rPr>
-                        <a:t>AI历史展席位、研学指定线路露出、高层参观接待位</a:t>
+                        <a:t>主要展区露出、研学线路露出、参访接待位</a:t>
                       </a:r>
                     </a:p>
                   </a:txBody>
@@ -13787,7 +13511,7 @@
                           <a:latin typeface="微软雅黑"/>
                           <a:ea typeface="微软雅黑"/>
                         </a:rPr>
-                        <a:t>6–10</a:t>
+                        <a:t>若干</a:t>
                       </a:r>
                     </a:p>
                   </a:txBody>
@@ -13812,7 +13536,7 @@
                           <a:latin typeface="微软雅黑"/>
                           <a:ea typeface="微软雅黑"/>
                         </a:rPr>
-                        <a:t>展品合作伙伴</a:t>
+                        <a:t>展位合作伙伴</a:t>
                       </a:r>
                     </a:p>
                   </a:txBody>
@@ -13835,7 +13559,7 @@
                           <a:latin typeface="微软雅黑"/>
                           <a:ea typeface="微软雅黑"/>
                         </a:rPr>
-                        <a:t>展品捐赠+展位装修</a:t>
+                        <a:t>展位装修+内容维护</a:t>
                       </a:r>
                     </a:p>
                   </a:txBody>
@@ -13906,7 +13630,7 @@
                           <a:latin typeface="微软雅黑"/>
                           <a:ea typeface="微软雅黑"/>
                         </a:rPr>
-                        <a:t>战略渠道伙伴</a:t>
+                        <a:t>渠道合作伙伴</a:t>
                       </a:r>
                     </a:p>
                   </a:txBody>
@@ -13929,7 +13653,7 @@
                           <a:latin typeface="微软雅黑"/>
                           <a:ea typeface="微软雅黑"/>
                         </a:rPr>
-                        <a:t>流量/研学渠道/媒体</a:t>
+                        <a:t>研学/媒体/流量资源</a:t>
                       </a:r>
                     </a:p>
                   </a:txBody>
@@ -13952,7 +13676,7 @@
                           <a:latin typeface="微软雅黑"/>
                           <a:ea typeface="微软雅黑"/>
                         </a:rPr>
-                        <a:t>渠道分成、联名研学产品</a:t>
+                        <a:t>渠道分成、联名产品</a:t>
                       </a:r>
                     </a:p>
                   </a:txBody>
@@ -14025,7 +13749,7 @@
                 <a:latin typeface="微软雅黑"/>
                 <a:ea typeface="微软雅黑"/>
               </a:rPr>
-              <a:t>•  华润路径：对齐其科创投入与向上汇报需求，同学通道 + 董事会材料双轨推进</a:t>
+              <a:t>•  战略赞助：对齐对方科创合作KPI，准备一页纸权益包与立项叙述</a:t>
             </a:r>
           </a:p>
           <a:p>
@@ -14042,7 +13766,7 @@
                 <a:latin typeface="微软雅黑"/>
                 <a:ea typeface="微软雅黑"/>
               </a:rPr>
-              <a:t>•  头部AI企业：捐赠换「行业历史席位」，比纯广告投放更易内部批准</a:t>
+              <a:t>•  企业展位：建设费+年度更新，合同约定露出与撤展及合作期限</a:t>
             </a:r>
           </a:p>
           <a:p>
@@ -14059,7 +13783,7 @@
                 <a:latin typeface="微软雅黑"/>
                 <a:ea typeface="微软雅黑"/>
               </a:rPr>
-              <a:t>•  场地方：免租+设备出资，换政绩场景、物业去化与租金/招商分成</a:t>
+              <a:t>•  场地方：租金阶梯优惠/装修共担，换物业去化与可租面积分成</a:t>
             </a:r>
           </a:p>
         </p:txBody>
@@ -14201,7 +13925,7 @@
                 <a:latin typeface="微软雅黑"/>
                 <a:ea typeface="微软雅黑"/>
               </a:rPr>
-              <a:t>盈利逻辑：展馆不靠卖票养活，靠IP经营赚钱</a:t>
+              <a:t>盈利逻辑：空间经营 + 服务 + 赞助</a:t>
             </a:r>
           </a:p>
         </p:txBody>
@@ -14237,7 +13961,7 @@
                 <a:latin typeface="微软雅黑"/>
                 <a:ea typeface="微软雅黑"/>
               </a:rPr>
-              <a:t>展馆本体以「捐赠+补贴+赞助」覆盖建设与基础运营；可核算利润主要来自空间经营、研学与认证相关服务、孵化投资、模板输出与海…</a:t>
+              <a:t>一期以「空间经营 + 服务收入 + 赞助」覆盖运营；展陈成本靠赞助、专项与开办资金消化。不把门票、境外账号变现、外埠…</a:t>
             </a:r>
           </a:p>
         </p:txBody>
@@ -14302,7 +14026,7 @@
                 <a:gridCol w="2880360"/>
                 <a:gridCol w="2880360"/>
               </a:tblGrid>
-              <a:tr h="718457">
+              <a:tr h="838200">
                 <a:tc>
                   <a:txBody>
                     <a:bodyPr/>
@@ -14400,7 +14124,7 @@
                   </a:tcPr>
                 </a:tc>
               </a:tr>
-              <a:tr h="718457">
+              <a:tr h="838200">
                 <a:tc>
                   <a:txBody>
                     <a:bodyPr wrap="square"/>
@@ -14414,7 +14138,7 @@
                           <a:latin typeface="微软雅黑"/>
                           <a:ea typeface="微软雅黑"/>
                         </a:rPr>
-                        <a:t>1. 剩余楼层租金与运营服务</a:t>
+                        <a:t>1. 配套空间租金与运营服务</a:t>
                       </a:r>
                     </a:p>
                   </a:txBody>
@@ -14460,7 +14184,7 @@
                           <a:latin typeface="微软雅黑"/>
                           <a:ea typeface="微软雅黑"/>
                         </a:rPr>
-                        <a:t>场地签约、完成基础装修与招商手册</a:t>
+                        <a:t>租约落地、基础装修完成、招商手册发布</a:t>
                       </a:r>
                     </a:p>
                   </a:txBody>
@@ -14483,7 +14207,7 @@
                           <a:latin typeface="微软雅黑"/>
                           <a:ea typeface="微软雅黑"/>
                         </a:rPr>
-                        <a:t>开馆12个月内出租率≥70%</a:t>
+                        <a:t>开业12个月内可租面积去化达标（指标在预算中单列）</a:t>
                       </a:r>
                     </a:p>
                   </a:txBody>
@@ -14494,7 +14218,7 @@
                   </a:tcPr>
                 </a:tc>
               </a:tr>
-              <a:tr h="718457">
+              <a:tr h="838200">
                 <a:tc>
                   <a:txBody>
                     <a:bodyPr wrap="square"/>
@@ -14508,7 +14232,7 @@
                           <a:latin typeface="微软雅黑"/>
                           <a:ea typeface="微软雅黑"/>
                         </a:rPr>
-                        <a:t>2. 研学与培训接待</a:t>
+                        <a:t>2. 研学与培训服务</a:t>
                       </a:r>
                     </a:p>
                   </a:txBody>
@@ -14554,7 +14278,7 @@
                           <a:latin typeface="微软雅黑"/>
                           <a:ea typeface="微软雅黑"/>
                         </a:rPr>
-                        <a:t>展陈开放+课程包+安全预案；争取纳入区研学目录</a:t>
+                        <a:t>展陈开放、课程与安全预案、争取进入区研学/科普目录</a:t>
                       </a:r>
                     </a:p>
                   </a:txBody>
@@ -14577,7 +14301,7 @@
                           <a:latin typeface="微软雅黑"/>
                           <a:ea typeface="微软雅黑"/>
                         </a:rPr>
-                        <a:t>对标现有机器人展厅「上午三场下午三场」接待强度</a:t>
+                        <a:t>完成首个完整学期的排期与回款</a:t>
                       </a:r>
                     </a:p>
                   </a:txBody>
@@ -14588,7 +14312,7 @@
                   </a:tcPr>
                 </a:tc>
               </a:tr>
-              <a:tr h="718457">
+              <a:tr h="838200">
                 <a:tc>
                   <a:txBody>
                     <a:bodyPr wrap="square"/>
@@ -14602,7 +14326,7 @@
                           <a:latin typeface="微软雅黑"/>
                           <a:ea typeface="微软雅黑"/>
                         </a:rPr>
-                        <a:t>3. 认证与教育产品服务</a:t>
+                        <a:t>3. 企业展位与活动赞助</a:t>
                       </a:r>
                     </a:p>
                   </a:txBody>
@@ -14625,12 +14349,177 @@
                           <a:latin typeface="微软雅黑"/>
                           <a:ea typeface="微软雅黑"/>
                         </a:rPr>
+                        <a:t>15–25%</a:t>
+                      </a:r>
+                    </a:p>
+                  </a:txBody>
+                  <a:tcPr>
+                    <a:solidFill>
+                      <a:srgbClr val="FFFFFF"/>
+                    </a:solidFill>
+                  </a:tcPr>
+                </a:tc>
+                <a:tc>
+                  <a:txBody>
+                    <a:bodyPr wrap="square"/>
+                    <a:lstStyle/>
+                    <a:p>
+                      <a:r>
+                        <a:rPr sz="900" b="0">
+                          <a:solidFill>
+                            <a:srgbClr val="1A2B2E"/>
+                          </a:solidFill>
+                          <a:latin typeface="微软雅黑"/>
+                          <a:ea typeface="微软雅黑"/>
+                        </a:rPr>
+                        <a:t>权益包与价目表定稿、首批意向客户签约</a:t>
+                      </a:r>
+                    </a:p>
+                  </a:txBody>
+                  <a:tcPr>
+                    <a:solidFill>
+                      <a:srgbClr val="FFFFFF"/>
+                    </a:solidFill>
+                  </a:tcPr>
+                </a:tc>
+                <a:tc>
+                  <a:txBody>
+                    <a:bodyPr wrap="square"/>
+                    <a:lstStyle/>
+                    <a:p>
+                      <a:r>
+                        <a:rPr sz="900" b="0">
+                          <a:solidFill>
+                            <a:srgbClr val="1A2B2E"/>
+                          </a:solidFill>
+                          <a:latin typeface="微软雅黑"/>
+                          <a:ea typeface="微软雅黑"/>
+                        </a:rPr>
+                        <a:t>开业时主赞助+不少于约定数量的展位合同</a:t>
+                      </a:r>
+                    </a:p>
+                  </a:txBody>
+                  <a:tcPr>
+                    <a:solidFill>
+                      <a:srgbClr val="FFFFFF"/>
+                    </a:solidFill>
+                  </a:tcPr>
+                </a:tc>
+              </a:tr>
+              <a:tr h="838200">
+                <a:tc>
+                  <a:txBody>
+                    <a:bodyPr wrap="square"/>
+                    <a:lstStyle/>
+                    <a:p>
+                      <a:r>
+                        <a:rPr sz="900" b="0">
+                          <a:solidFill>
+                            <a:srgbClr val="1A2B2E"/>
+                          </a:solidFill>
+                          <a:latin typeface="微软雅黑"/>
+                          <a:ea typeface="微软雅黑"/>
+                        </a:rPr>
+                        <a:t>4. 园区/入驻服务费</a:t>
+                      </a:r>
+                    </a:p>
+                  </a:txBody>
+                  <a:tcPr>
+                    <a:solidFill>
+                      <a:srgbClr val="D7EBE6"/>
+                    </a:solidFill>
+                  </a:tcPr>
+                </a:tc>
+                <a:tc>
+                  <a:txBody>
+                    <a:bodyPr wrap="square"/>
+                    <a:lstStyle/>
+                    <a:p>
+                      <a:r>
+                        <a:rPr sz="900" b="0">
+                          <a:solidFill>
+                            <a:srgbClr val="1A2B2E"/>
+                          </a:solidFill>
+                          <a:latin typeface="微软雅黑"/>
+                          <a:ea typeface="微软雅黑"/>
+                        </a:rPr>
                         <a:t>5–10%</a:t>
                       </a:r>
                     </a:p>
                   </a:txBody>
                   <a:tcPr>
                     <a:solidFill>
+                      <a:srgbClr val="D7EBE6"/>
+                    </a:solidFill>
+                  </a:tcPr>
+                </a:tc>
+                <a:tc>
+                  <a:txBody>
+                    <a:bodyPr wrap="square"/>
+                    <a:lstStyle/>
+                    <a:p>
+                      <a:r>
+                        <a:rPr sz="900" b="0">
+                          <a:solidFill>
+                            <a:srgbClr val="1A2B2E"/>
+                          </a:solidFill>
+                          <a:latin typeface="微软雅黑"/>
+                          <a:ea typeface="微软雅黑"/>
+                        </a:rPr>
+                        <a:t>入驻协议模板、服务清单与定价</a:t>
+                      </a:r>
+                    </a:p>
+                  </a:txBody>
+                  <a:tcPr>
+                    <a:solidFill>
+                      <a:srgbClr val="D7EBE6"/>
+                    </a:solidFill>
+                  </a:tcPr>
+                </a:tc>
+                <a:tc>
+                  <a:txBody>
+                    <a:bodyPr wrap="square"/>
+                    <a:lstStyle/>
+                    <a:p>
+                      <a:r>
+                        <a:rPr sz="900" b="0">
+                          <a:solidFill>
+                            <a:srgbClr val="1A2B2E"/>
+                          </a:solidFill>
+                          <a:latin typeface="微软雅黑"/>
+                          <a:ea typeface="微软雅黑"/>
+                        </a:rPr>
+                        <a:t>首批入驻签约</a:t>
+                      </a:r>
+                    </a:p>
+                  </a:txBody>
+                  <a:tcPr>
+                    <a:solidFill>
+                      <a:srgbClr val="D7EBE6"/>
+                    </a:solidFill>
+                  </a:tcPr>
+                </a:tc>
+              </a:tr>
+              <a:tr h="838200">
+                <a:tc>
+                  <a:txBody>
+                    <a:bodyPr wrap="square"/>
+                    <a:lstStyle/>
+                    <a:p>
+                      <a:r>
+                        <a:rPr sz="900" b="0">
+                          <a:solidFill>
+                            <a:srgbClr val="1A2B2E"/>
+                          </a:solidFill>
+                          <a:latin typeface="微软雅黑"/>
+                          <a:ea typeface="微软雅黑"/>
+                        </a:rPr>
+                        <a:t>5. 运营咨询与模式输出（后期）</a:t>
+                      </a:r>
+                    </a:p>
+                  </a:txBody>
+                  <a:tcPr>
+                    <a:solidFill>
                       <a:srgbClr val="FFFFFF"/>
                     </a:solidFill>
                   </a:tcPr>
@@ -14648,7 +14537,7 @@
                           <a:latin typeface="微软雅黑"/>
                           <a:ea typeface="微软雅黑"/>
                         </a:rPr>
-                        <a:t>上海统一认证路径明确、与教育主管部门沟通</a:t>
+                        <a:t>0–10%（后期）</a:t>
                       </a:r>
                     </a:p>
                   </a:txBody>
@@ -14671,7 +14560,7 @@
                           <a:latin typeface="微软雅黑"/>
                           <a:ea typeface="微软雅黑"/>
                         </a:rPr>
-                        <a:t>首批10个合作单元落地</a:t>
+                        <a:t>本地运营满至少一个完整财年并沉淀SOP</a:t>
                       </a:r>
                     </a:p>
                   </a:txBody>
@@ -14681,8 +14570,6 @@
                     </a:solidFill>
                   </a:tcPr>
                 </a:tc>
-              </a:tr>
-              <a:tr h="718457">
                 <a:tc>
                   <a:txBody>
                     <a:bodyPr wrap="square"/>
@@ -14696,270 +14583,13 @@
                           <a:latin typeface="微软雅黑"/>
                           <a:ea typeface="微软雅黑"/>
                         </a:rPr>
-                        <a:t>4. 孵化投资收益</a:t>
-                      </a:r>
-                    </a:p>
-                  </a:txBody>
-                  <a:tcPr>
-                    <a:solidFill>
-                      <a:srgbClr val="D7EBE6"/>
-                    </a:solidFill>
-                  </a:tcPr>
-                </a:tc>
-                <a:tc>
-                  <a:txBody>
-                    <a:bodyPr wrap="square"/>
-                    <a:lstStyle/>
-                    <a:p>
-                      <a:r>
-                        <a:rPr sz="900" b="0">
-                          <a:solidFill>
-                            <a:srgbClr val="1A2B2E"/>
-                          </a:solidFill>
-                          <a:latin typeface="微软雅黑"/>
-                          <a:ea typeface="微软雅黑"/>
-                        </a:rPr>
-                        <a:t>10–20%（波动大）</a:t>
-                      </a:r>
-                    </a:p>
-                  </a:txBody>
-                  <a:tcPr>
-                    <a:solidFill>
-                      <a:srgbClr val="D7EBE6"/>
-                    </a:solidFill>
-                  </a:tcPr>
-                </a:tc>
-                <a:tc>
-                  <a:txBody>
-                    <a:bodyPr wrap="square"/>
-                    <a:lstStyle/>
-                    <a:p>
-                      <a:r>
-                        <a:rPr sz="900" b="0">
-                          <a:solidFill>
-                            <a:srgbClr val="1A2B2E"/>
-                          </a:solidFill>
-                          <a:latin typeface="微软雅黑"/>
-                          <a:ea typeface="微软雅黑"/>
-                        </a:rPr>
-                        <a:t>入驻协议含投资条款；可选设小规模跟投池</a:t>
-                      </a:r>
-                    </a:p>
-                  </a:txBody>
-                  <a:tcPr>
-                    <a:solidFill>
-                      <a:srgbClr val="D7EBE6"/>
-                    </a:solidFill>
-                  </a:tcPr>
-                </a:tc>
-                <a:tc>
-                  <a:txBody>
-                    <a:bodyPr wrap="square"/>
-                    <a:lstStyle/>
-                    <a:p>
-                      <a:r>
-                        <a:rPr sz="900" b="0">
-                          <a:solidFill>
-                            <a:srgbClr val="1A2B2E"/>
-                          </a:solidFill>
-                          <a:latin typeface="微软雅黑"/>
-                          <a:ea typeface="微软雅黑"/>
-                        </a:rPr>
-                        <a:t>每年重点跟投3–5个项目</a:t>
-                      </a:r>
-                    </a:p>
-                  </a:txBody>
-                  <a:tcPr>
-                    <a:solidFill>
-                      <a:srgbClr val="D7EBE6"/>
-                    </a:solidFill>
-                  </a:tcPr>
-                </a:tc>
-              </a:tr>
-              <a:tr h="718457">
-                <a:tc>
-                  <a:txBody>
-                    <a:bodyPr wrap="square"/>
-                    <a:lstStyle/>
-                    <a:p>
-                      <a:r>
-                        <a:rPr sz="900" b="0">
-                          <a:solidFill>
-                            <a:srgbClr val="1A2B2E"/>
-                          </a:solidFill>
-                          <a:latin typeface="微软雅黑"/>
-                          <a:ea typeface="微软雅黑"/>
-                        </a:rPr>
-                        <a:t>5. 样板模板输出</a:t>
+                        <a:t>首单外部咨询合同（可选）</a:t>
                       </a:r>
                     </a:p>
                   </a:txBody>
                   <a:tcPr>
                     <a:solidFill>
                       <a:srgbClr val="FFFFFF"/>
-                    </a:solidFill>
-                  </a:tcPr>
-                </a:tc>
-                <a:tc>
-                  <a:txBody>
-                    <a:bodyPr wrap="square"/>
-                    <a:lstStyle/>
-                    <a:p>
-                      <a:r>
-                        <a:rPr sz="900" b="0">
-                          <a:solidFill>
-                            <a:srgbClr val="1A2B2E"/>
-                          </a:solidFill>
-                          <a:latin typeface="微软雅黑"/>
-                          <a:ea typeface="微软雅黑"/>
-                        </a:rPr>
-                        <a:t>10–15%</a:t>
-                      </a:r>
-                    </a:p>
-                  </a:txBody>
-                  <a:tcPr>
-                    <a:solidFill>
-                      <a:srgbClr val="FFFFFF"/>
-                    </a:solidFill>
-                  </a:tcPr>
-                </a:tc>
-                <a:tc>
-                  <a:txBody>
-                    <a:bodyPr wrap="square"/>
-                    <a:lstStyle/>
-                    <a:p>
-                      <a:r>
-                        <a:rPr sz="900" b="0">
-                          <a:solidFill>
-                            <a:srgbClr val="1A2B2E"/>
-                          </a:solidFill>
-                          <a:latin typeface="微软雅黑"/>
-                          <a:ea typeface="微软雅黑"/>
-                        </a:rPr>
-                        <a:t>开馆运营满1个完整研学季、沉淀SOP与IP</a:t>
-                      </a:r>
-                    </a:p>
-                  </a:txBody>
-                  <a:tcPr>
-                    <a:solidFill>
-                      <a:srgbClr val="FFFFFF"/>
-                    </a:solidFill>
-                  </a:tcPr>
-                </a:tc>
-                <a:tc>
-                  <a:txBody>
-                    <a:bodyPr wrap="square"/>
-                    <a:lstStyle/>
-                    <a:p>
-                      <a:r>
-                        <a:rPr sz="900" b="0">
-                          <a:solidFill>
-                            <a:srgbClr val="1A2B2E"/>
-                          </a:solidFill>
-                          <a:latin typeface="微软雅黑"/>
-                          <a:ea typeface="微软雅黑"/>
-                        </a:rPr>
-                        <a:t>首个外埠复制意向框架协议</a:t>
-                      </a:r>
-                    </a:p>
-                  </a:txBody>
-                  <a:tcPr>
-                    <a:solidFill>
-                      <a:srgbClr val="FFFFFF"/>
-                    </a:solidFill>
-                  </a:tcPr>
-                </a:tc>
-              </a:tr>
-              <a:tr h="718458">
-                <a:tc>
-                  <a:txBody>
-                    <a:bodyPr wrap="square"/>
-                    <a:lstStyle/>
-                    <a:p>
-                      <a:r>
-                        <a:rPr sz="900" b="0">
-                          <a:solidFill>
-                            <a:srgbClr val="1A2B2E"/>
-                          </a:solidFill>
-                          <a:latin typeface="微软雅黑"/>
-                          <a:ea typeface="微软雅黑"/>
-                        </a:rPr>
-                        <a:t>6. 海外内容变现</a:t>
-                      </a:r>
-                    </a:p>
-                  </a:txBody>
-                  <a:tcPr>
-                    <a:solidFill>
-                      <a:srgbClr val="D7EBE6"/>
-                    </a:solidFill>
-                  </a:tcPr>
-                </a:tc>
-                <a:tc>
-                  <a:txBody>
-                    <a:bodyPr wrap="square"/>
-                    <a:lstStyle/>
-                    <a:p>
-                      <a:r>
-                        <a:rPr sz="900" b="0">
-                          <a:solidFill>
-                            <a:srgbClr val="1A2B2E"/>
-                          </a:solidFill>
-                          <a:latin typeface="微软雅黑"/>
-                          <a:ea typeface="微软雅黑"/>
-                        </a:rPr>
-                        <a:t>5–10%</a:t>
-                      </a:r>
-                    </a:p>
-                  </a:txBody>
-                  <a:tcPr>
-                    <a:solidFill>
-                      <a:srgbClr val="D7EBE6"/>
-                    </a:solidFill>
-                  </a:tcPr>
-                </a:tc>
-                <a:tc>
-                  <a:txBody>
-                    <a:bodyPr wrap="square"/>
-                    <a:lstStyle/>
-                    <a:p>
-                      <a:r>
-                        <a:rPr sz="900" b="0">
-                          <a:solidFill>
-                            <a:srgbClr val="1A2B2E"/>
-                          </a:solidFill>
-                          <a:latin typeface="微软雅黑"/>
-                          <a:ea typeface="微软雅黑"/>
-                        </a:rPr>
-                        <a:t>内容团队+海外账号矩阵+授权合规</a:t>
-                      </a:r>
-                    </a:p>
-                  </a:txBody>
-                  <a:tcPr>
-                    <a:solidFill>
-                      <a:srgbClr val="D7EBE6"/>
-                    </a:solidFill>
-                  </a:tcPr>
-                </a:tc>
-                <a:tc>
-                  <a:txBody>
-                    <a:bodyPr wrap="square"/>
-                    <a:lstStyle/>
-                    <a:p>
-                      <a:r>
-                        <a:rPr sz="900" b="0">
-                          <a:solidFill>
-                            <a:srgbClr val="1A2B2E"/>
-                          </a:solidFill>
-                          <a:latin typeface="微软雅黑"/>
-                          <a:ea typeface="微软雅黑"/>
-                        </a:rPr>
-                        <a:t>稳定周更+单场直播商业化</a:t>
-                      </a:r>
-                    </a:p>
-                  </a:txBody>
-                  <a:tcPr>
-                    <a:solidFill>
-                      <a:srgbClr val="D7EBE6"/>
                     </a:solidFill>
                   </a:tcPr>
                 </a:tc>
@@ -15141,7 +14771,7 @@
                 <a:latin typeface="微软雅黑"/>
                 <a:ea typeface="微软雅黑"/>
               </a:rPr>
-              <a:t>研学强制要求 × 科协牵头 × 扶持基金 × 闲置物业</a:t>
+              <a:t>研学基地 × 社团合作 × 扶持基金 × 物业支持</a:t>
             </a:r>
           </a:p>
         </p:txBody>
@@ -15318,7 +14948,7 @@
                           <a:latin typeface="微软雅黑"/>
                           <a:ea typeface="微软雅黑"/>
                         </a:rPr>
-                        <a:t>教育部中学AI培训与研学要求</a:t>
+                        <a:t>中小学人工智能相关教育与研学</a:t>
                       </a:r>
                     </a:p>
                   </a:txBody>
@@ -15341,7 +14971,7 @@
                           <a:latin typeface="微软雅黑"/>
                           <a:ea typeface="微软雅黑"/>
                         </a:rPr>
-                        <a:t>刚性客流与B端采购</a:t>
+                        <a:t>B端团客与课程服务收入</a:t>
                       </a:r>
                     </a:p>
                   </a:txBody>
@@ -15364,7 +14994,7 @@
                           <a:latin typeface="微软雅黑"/>
                           <a:ea typeface="微软雅黑"/>
                         </a:rPr>
-                        <a:t>纳入区研学基地目录→课程与师资包备案→学校采购合同</a:t>
+                        <a:t>申报区研学/科普基地→课程备案→学校/机构采购合同</a:t>
                       </a:r>
                     </a:p>
                   </a:txBody>
@@ -15387,7 +15017,7 @@
                           <a:latin typeface="微软雅黑"/>
                           <a:ea typeface="微软雅黑"/>
                         </a:rPr>
-                        <a:t>国内运营+教育渠道</a:t>
+                        <a:t>陈红苗+教育渠道</a:t>
                       </a:r>
                     </a:p>
                   </a:txBody>
@@ -15412,7 +15042,7 @@
                           <a:latin typeface="微软雅黑"/>
                           <a:ea typeface="微软雅黑"/>
                         </a:rPr>
-                        <a:t>AI教育产品强制认证</a:t>
+                        <a:t>教育与科普场馆规范</a:t>
                       </a:r>
                     </a:p>
                   </a:txBody>
@@ -15435,7 +15065,7 @@
                           <a:latin typeface="微软雅黑"/>
                           <a:ea typeface="微软雅黑"/>
                         </a:rPr>
-                        <a:t>展馆成为认证展示与验证场</a:t>
+                        <a:t>合规展陈与可售服务前提</a:t>
                       </a:r>
                     </a:p>
                   </a:txBody>
@@ -15458,7 +15088,7 @@
                           <a:latin typeface="微软雅黑"/>
                           <a:ea typeface="微软雅黑"/>
                         </a:rPr>
-                        <a:t>对接认证主体→设立认证展示专区→服务产品报价</a:t>
+                        <a:t>梳理准入清单→必要时对接认证/备案主体→服务产品合规化</a:t>
                       </a:r>
                     </a:p>
                   </a:txBody>
@@ -15481,7 +15111,7 @@
                           <a:latin typeface="微软雅黑"/>
                           <a:ea typeface="微软雅黑"/>
                         </a:rPr>
-                        <a:t>产品+政府关系</a:t>
+                        <a:t>运营+政府关系</a:t>
                       </a:r>
                     </a:p>
                   </a:txBody>
@@ -15506,7 +15136,7 @@
                           <a:latin typeface="微软雅黑"/>
                           <a:ea typeface="微软雅黑"/>
                         </a:rPr>
-                        <a:t>中国科协牵头主管</a:t>
+                        <a:t>科协等社团合作挂牌</a:t>
                       </a:r>
                     </a:p>
                   </a:txBody>
@@ -15529,7 +15159,7 @@
                           <a:latin typeface="微软雅黑"/>
                           <a:ea typeface="微软雅黑"/>
                         </a:rPr>
-                        <a:t>名称、资质、全国复制通道</a:t>
+                        <a:t>专业背书与科普活动资源</a:t>
                       </a:r>
                     </a:p>
                   </a:txBody>
@@ -15552,7 +15182,7 @@
                           <a:latin typeface="微软雅黑"/>
                           <a:ea typeface="微软雅黑"/>
                         </a:rPr>
-                        <a:t>正式请示/合作备忘录→名称核准路径→科普专项申报</a:t>
+                        <a:t>合作备忘录→挂牌与活动计划→按年度申报可获经费</a:t>
                       </a:r>
                     </a:p>
                   </a:txBody>
@@ -15575,7 +15205,7 @@
                           <a:latin typeface="微软雅黑"/>
                           <a:ea typeface="微软雅黑"/>
                         </a:rPr>
-                        <a:t>发起人+胡老师材料</a:t>
+                        <a:t>陈胜线索+胡继刚材料</a:t>
                       </a:r>
                     </a:p>
                   </a:txBody>
@@ -15600,7 +15230,7 @@
                           <a:latin typeface="微软雅黑"/>
                           <a:ea typeface="微软雅黑"/>
                         </a:rPr>
-                        <a:t>地方政府科创政绩与闲置物业盘活</a:t>
+                        <a:t>闲置物业盘活与租金支持</a:t>
                       </a:r>
                     </a:p>
                   </a:txBody>
@@ -15623,7 +15253,7 @@
                           <a:latin typeface="微软雅黑"/>
                           <a:ea typeface="微软雅黑"/>
                         </a:rPr>
-                        <a:t>免租场地+装修配套资金谈判筹码</a:t>
+                        <a:t>降低开办期租金与改造压力（以批复为准）</a:t>
                       </a:r>
                     </a:p>
                   </a:txBody>
@@ -15646,7 +15276,7 @@
                           <a:latin typeface="微软雅黑"/>
                           <a:ea typeface="微软雅黑"/>
                         </a:rPr>
-                        <a:t>区领导汇报→重点项目入库→土地/物业会议纪要</a:t>
+                        <a:t>区领导/平台汇报→政策适用性确认→写入租约附件</a:t>
                       </a:r>
                     </a:p>
                   </a:txBody>
@@ -15694,7 +15324,7 @@
                           <a:latin typeface="微软雅黑"/>
                           <a:ea typeface="微软雅黑"/>
                         </a:rPr>
-                        <a:t>区级/市级科创与文旅扶持资金</a:t>
+                        <a:t>区级/市级科创与文旅专项</a:t>
                       </a:r>
                     </a:p>
                   </a:txBody>
@@ -15717,7 +15347,7 @@
                           <a:latin typeface="微软雅黑"/>
                           <a:ea typeface="微软雅黑"/>
                         </a:rPr>
-                        <a:t>降低运营与内容成本</a:t>
+                        <a:t>补贴部分内容与活动成本</a:t>
                       </a:r>
                     </a:p>
                   </a:txBody>
@@ -15740,7 +15370,7 @@
                           <a:latin typeface="微软雅黑"/>
                           <a:ea typeface="微软雅黑"/>
                         </a:rPr>
-                        <a:t>列政策匹配表→按窗口期申报→审计合规台账</a:t>
+                        <a:t>政策匹配表→窗口期申报→验收审计台账</a:t>
                       </a:r>
                     </a:p>
                   </a:txBody>
@@ -15788,7 +15418,7 @@
                           <a:latin typeface="微软雅黑"/>
                           <a:ea typeface="微软雅黑"/>
                         </a:rPr>
-                        <a:t>世界人工智能大会（WAIC）资源延伸</a:t>
+                        <a:t>重大展会会后延伸</a:t>
                       </a:r>
                     </a:p>
                   </a:txBody>
@@ -15811,7 +15441,7 @@
                           <a:latin typeface="微软雅黑"/>
                           <a:ea typeface="微软雅黑"/>
                         </a:rPr>
-                        <a:t>内容新鲜度与城市品牌绑定</a:t>
+                        <a:t>内容更新与城市品牌联动</a:t>
                       </a:r>
                     </a:p>
                   </a:txBody>
@@ -15834,7 +15464,7 @@
                           <a:latin typeface="微软雅黑"/>
                           <a:ea typeface="微软雅黑"/>
                         </a:rPr>
-                        <a:t>对接大会组委会/承办方→会后巡展协议→常设展更新机制</a:t>
+                        <a:t>对接承办/组委会→会后合作备忘→常设更新机制</a:t>
                       </a:r>
                     </a:p>
                   </a:txBody>
@@ -15882,7 +15512,7 @@
                           <a:latin typeface="微软雅黑"/>
                           <a:ea typeface="微软雅黑"/>
                         </a:rPr>
-                        <a:t>产业引导基金/央国企科创考核</a:t>
+                        <a:t>产业引导基金与央国企合作</a:t>
                       </a:r>
                     </a:p>
                   </a:txBody>
@@ -15905,7 +15535,7 @@
                           <a:latin typeface="微软雅黑"/>
                           <a:ea typeface="微软雅黑"/>
                         </a:rPr>
-                        <a:t>主赞助与跟投资金</a:t>
+                        <a:t>补充开办或跟投资金</a:t>
                       </a:r>
                     </a:p>
                   </a:txBody>
@@ -15928,7 +15558,7 @@
                           <a:latin typeface="微软雅黑"/>
                           <a:ea typeface="微软雅黑"/>
                         </a:rPr>
-                        <a:t>对齐对方考核指标写立项→董事会/办公会材料→出资协议</a:t>
+                        <a:t>对齐对方考核与风控→立项材料→协议</a:t>
                       </a:r>
                     </a:p>
                   </a:txBody>
